--- a/examples/repositories/aham-showcase/deck.pptx
+++ b/examples/repositories/aham-showcase/deck.pptx
@@ -274,7 +274,7 @@
           <a:p>
             <a:r>
               <a:rPr lang="zh-CN" dirty="0"/>
-              <a:t>前日に入口を用意し、朝は一つの作業に取り組み、最後に続きを残す三層の配置案です。</a:t>
+              <a:t>前日に作業の入口を一つ決め、朝はその作業を進め、終了時に続きを一言残す流れの案です。</a:t>
             </a:r>
           </a:p>
         </p:txBody>
@@ -3349,7 +3349,7 @@
             <a:avLst/>
           </a:prstGeom>
           <a:solidFill>
-            <a:srgbClr val="3156C5"/>
+            <a:srgbClr val="FFFFFF"/>
           </a:solidFill>
           <a:ln>
             <a:noFill/>
@@ -3371,7 +3371,7 @@
             <a:avLst/>
           </a:prstGeom>
           <a:solidFill>
-            <a:srgbClr val="F5DC49"/>
+            <a:srgbClr val="336EE8"/>
           </a:solidFill>
           <a:ln>
             <a:noFill/>
@@ -3387,7 +3387,7 @@
         <p:spPr>
           <a:xfrm>
             <a:off x="572452" y="570071"/>
-            <a:ext cx="2761857" cy="289560"/>
+            <a:ext cx="765262" cy="289560"/>
           </a:xfrm>
           <a:prstGeom prst="rect">
             <a:avLst/>
@@ -3407,13 +3407,13 @@
             <a:r>
               <a:rPr lang="zh-CN" sz="1425" b="1" dirty="0">
                 <a:solidFill>
-                  <a:srgbClr val="F5DC49"/>
-                </a:solidFill>
-                <a:latin typeface="Zen Kaku Gothic New"/>
-                <a:ea typeface="Microsoft YaHei"/>
-                <a:cs typeface="Zen Kaku Gothic New"/>
+                  <a:srgbClr val="262626"/>
+                </a:solidFill>
+                <a:latin typeface="Manrope"/>
+                <a:ea typeface="Zen Kaku Gothic New"/>
+                <a:cs typeface="Manrope"/>
               </a:rPr>
-              <a:t>MORNING / WORKSHOP</a:t>
+              <a:t>朝作業</a:t>
             </a:r>
           </a:p>
         </p:txBody>
@@ -3427,7 +3427,7 @@
         <p:spPr>
           <a:xfrm>
             <a:off x="337185" y="2599372"/>
-            <a:ext cx="5763669" cy="701040"/>
+            <a:ext cx="5302202" cy="701040"/>
           </a:xfrm>
           <a:prstGeom prst="rect">
             <a:avLst/>
@@ -3447,60 +3447,20 @@
             <a:r>
               <a:rPr lang="zh-CN" sz="3450" b="1" dirty="0">
                 <a:solidFill>
-                  <a:srgbClr val="F5DC49"/>
-                </a:solidFill>
-                <a:latin typeface="Zen Kaku Gothic New"/>
-                <a:ea typeface="Microsoft YaHei"/>
-                <a:cs typeface="Zen Kaku Gothic New"/>
+                  <a:srgbClr val="262626"/>
+                </a:solidFill>
+                <a:latin typeface="Manrope"/>
+                <a:ea typeface="Zen Kaku Gothic New"/>
+                <a:cs typeface="Manrope"/>
               </a:rPr>
-              <a:t>朝の20分を、組み直す。</a:t>
-            </a:r>
-          </a:p>
-        </p:txBody>
-      </p:sp>
-      <p:sp>
-        <p:nvSpPr>
-          <p:cNvPr id="6" name="TextBox 6"/>
-          <p:cNvSpPr txBox="1"/>
-          <p:nvPr/>
-        </p:nvSpPr>
-        <p:spPr>
-          <a:xfrm>
-            <a:off x="362902" y="3408521"/>
-            <a:ext cx="2985190" cy="289560"/>
-          </a:xfrm>
-          <a:prstGeom prst="rect">
-            <a:avLst/>
-          </a:prstGeom>
-          <a:noFill/>
-          <a:ln>
-            <a:noFill/>
-          </a:ln>
-        </p:spPr>
-        <p:txBody>
-          <a:bodyPr wrap="none" lIns="0" tIns="0" rIns="0" bIns="0" anchor="t" anchorCtr="0">
-            <a:spAutoFit/>
-          </a:bodyPr>
-          <a:lstStyle/>
-          <a:p>
-            <a:pPr algn="l"/>
-            <a:r>
-              <a:rPr lang="zh-CN" sz="1425" dirty="0">
-                <a:solidFill>
-                  <a:srgbClr val="F3F0E3"/>
-                </a:solidFill>
-                <a:latin typeface="Zen Kaku Gothic New"/>
-                <a:ea typeface="Microsoft YaHei"/>
-                <a:cs typeface="Zen Kaku Gothic New"/>
-              </a:rPr>
-              <a:t>ひとつ選ぶ。取り組む。次を残す。</a:t>
-            </a:r>
-          </a:p>
-        </p:txBody>
-      </p:sp>
-      <p:sp>
-        <p:nvSpPr>
-          <p:cNvPr id="7" name="Rectangle 7"/>
+              <a:t>朝の作業ワークショップ案</a:t>
+            </a:r>
+          </a:p>
+        </p:txBody>
+      </p:sp>
+      <p:sp>
+        <p:nvSpPr>
+          <p:cNvPr id="6" name="Rectangle 6"/>
           <p:cNvSpPr/>
           <p:nvPr/>
         </p:nvSpPr>
@@ -3513,7 +3473,7 @@
             <a:avLst/>
           </a:prstGeom>
           <a:solidFill>
-            <a:srgbClr val="F5DC49"/>
+            <a:srgbClr val="336EE8"/>
           </a:solidFill>
           <a:ln>
             <a:noFill/>
@@ -3522,7 +3482,7 @@
       </p:sp>
       <p:sp>
         <p:nvSpPr>
-          <p:cNvPr id="8" name="Line 8"/>
+          <p:cNvPr id="7" name="Line 7"/>
           <p:cNvSpPr/>
           <p:nvPr/>
         </p:nvSpPr>
@@ -3551,21 +3511,21 @@
           <a:noFill/>
           <a:ln w="9525">
             <a:solidFill>
-              <a:srgbClr val="F5DC49"/>
+              <a:srgbClr val="E7E7E7"/>
             </a:solidFill>
           </a:ln>
         </p:spPr>
       </p:sp>
       <p:sp>
         <p:nvSpPr>
-          <p:cNvPr id="9" name="TextBox 9"/>
+          <p:cNvPr id="8" name="TextBox 8"/>
           <p:cNvSpPr txBox="1"/>
           <p:nvPr/>
         </p:nvSpPr>
         <p:spPr>
           <a:xfrm>
-            <a:off x="8481060" y="2689860"/>
-            <a:ext cx="1120737" cy="243840"/>
+            <a:off x="8483918" y="2714149"/>
+            <a:ext cx="338498" cy="198120"/>
           </a:xfrm>
           <a:prstGeom prst="rect">
             <a:avLst/>
@@ -3583,22 +3543,22 @@
           <a:p>
             <a:pPr algn="l"/>
             <a:r>
-              <a:rPr lang="zh-CN" sz="1200" dirty="0">
-                <a:solidFill>
-                  <a:srgbClr val="F5DC49"/>
-                </a:solidFill>
-                <a:latin typeface="Zen Kaku Gothic New"/>
-                <a:ea typeface="Microsoft YaHei"/>
-                <a:cs typeface="Zen Kaku Gothic New"/>
+              <a:rPr lang="zh-CN" sz="975" dirty="0">
+                <a:solidFill>
+                  <a:srgbClr val="9B9B9B"/>
+                </a:solidFill>
+                <a:latin typeface="Manrope"/>
+                <a:ea typeface="Zen Kaku Gothic New"/>
+                <a:cs typeface="Manrope"/>
               </a:rPr>
-              <a:t>この案で試すこと</a:t>
-            </a:r>
-          </a:p>
-        </p:txBody>
-      </p:sp>
-      <p:sp>
-        <p:nvSpPr>
-          <p:cNvPr id="10" name="TextBox 10"/>
+              <a:t>目次</a:t>
+            </a:r>
+          </a:p>
+        </p:txBody>
+      </p:sp>
+      <p:sp>
+        <p:nvSpPr>
+          <p:cNvPr id="9" name="TextBox 9"/>
           <p:cNvSpPr txBox="1"/>
           <p:nvPr/>
         </p:nvSpPr>
@@ -3625,10 +3585,10 @@
             <a:r>
               <a:rPr lang="zh-CN" sz="1200" dirty="0">
                 <a:solidFill>
-                  <a:srgbClr val="F5DC49"/>
+                  <a:srgbClr val="9B9B9B"/>
                 </a:solidFill>
                 <a:latin typeface="Manrope"/>
-                <a:ea typeface="Microsoft YaHei"/>
+                <a:ea typeface="Zen Kaku Gothic New"/>
                 <a:cs typeface="Manrope"/>
               </a:rPr>
               <a:t>01</a:t>
@@ -3638,14 +3598,14 @@
       </p:sp>
       <p:sp>
         <p:nvSpPr>
-          <p:cNvPr id="11" name="TextBox 11"/>
+          <p:cNvPr id="10" name="TextBox 10"/>
           <p:cNvSpPr txBox="1"/>
           <p:nvPr/>
         </p:nvSpPr>
         <p:spPr>
           <a:xfrm>
             <a:off x="8899208" y="3138964"/>
-            <a:ext cx="1021850" cy="259080"/>
+            <a:ext cx="852917" cy="259080"/>
           </a:xfrm>
           <a:prstGeom prst="rect">
             <a:avLst/>
@@ -3665,20 +3625,20 @@
             <a:r>
               <a:rPr lang="zh-CN" sz="1275" dirty="0">
                 <a:solidFill>
-                  <a:srgbClr val="F5DC49"/>
-                </a:solidFill>
-                <a:latin typeface="Zen Kaku Gothic New"/>
-                <a:ea typeface="Microsoft YaHei"/>
-                <a:cs typeface="Zen Kaku Gothic New"/>
+                  <a:srgbClr val="262626"/>
+                </a:solidFill>
+                <a:latin typeface="Manrope"/>
+                <a:ea typeface="Zen Kaku Gothic New"/>
+                <a:cs typeface="Manrope"/>
               </a:rPr>
-              <a:t>時間を並べる</a:t>
-            </a:r>
-          </a:p>
-        </p:txBody>
-      </p:sp>
-      <p:sp>
-        <p:nvSpPr>
-          <p:cNvPr id="12" name="TextBox 12"/>
+              <a:t>時間配分</a:t>
+            </a:r>
+          </a:p>
+        </p:txBody>
+      </p:sp>
+      <p:sp>
+        <p:nvSpPr>
+          <p:cNvPr id="11" name="TextBox 11"/>
           <p:cNvSpPr txBox="1"/>
           <p:nvPr/>
         </p:nvSpPr>
@@ -3705,10 +3665,10 @@
             <a:r>
               <a:rPr lang="zh-CN" sz="1200" dirty="0">
                 <a:solidFill>
-                  <a:srgbClr val="F5DC49"/>
+                  <a:srgbClr val="9B9B9B"/>
                 </a:solidFill>
                 <a:latin typeface="Manrope"/>
-                <a:ea typeface="Microsoft YaHei"/>
+                <a:ea typeface="Zen Kaku Gothic New"/>
                 <a:cs typeface="Manrope"/>
               </a:rPr>
               <a:t>02</a:t>
@@ -3718,14 +3678,14 @@
       </p:sp>
       <p:sp>
         <p:nvSpPr>
-          <p:cNvPr id="13" name="TextBox 13"/>
+          <p:cNvPr id="12" name="TextBox 12"/>
           <p:cNvSpPr txBox="1"/>
           <p:nvPr/>
         </p:nvSpPr>
         <p:spPr>
           <a:xfrm>
             <a:off x="8899208" y="3539014"/>
-            <a:ext cx="897162" cy="259080"/>
+            <a:ext cx="977606" cy="259080"/>
           </a:xfrm>
           <a:prstGeom prst="rect">
             <a:avLst/>
@@ -3745,20 +3705,20 @@
             <a:r>
               <a:rPr lang="zh-CN" sz="1275" dirty="0">
                 <a:solidFill>
-                  <a:srgbClr val="F5DC49"/>
-                </a:solidFill>
-                <a:latin typeface="Zen Kaku Gothic New"/>
-                <a:ea typeface="Microsoft YaHei"/>
-                <a:cs typeface="Zen Kaku Gothic New"/>
+                  <a:srgbClr val="262626"/>
+                </a:solidFill>
+                <a:latin typeface="Manrope"/>
+                <a:ea typeface="Zen Kaku Gothic New"/>
+                <a:cs typeface="Manrope"/>
               </a:rPr>
-              <a:t>作業を置く</a:t>
-            </a:r>
-          </a:p>
-        </p:txBody>
-      </p:sp>
-      <p:sp>
-        <p:nvSpPr>
-          <p:cNvPr id="14" name="TextBox 14"/>
+              <a:t>作業の入口</a:t>
+            </a:r>
+          </a:p>
+        </p:txBody>
+      </p:sp>
+      <p:sp>
+        <p:nvSpPr>
+          <p:cNvPr id="13" name="TextBox 13"/>
           <p:cNvSpPr txBox="1"/>
           <p:nvPr/>
         </p:nvSpPr>
@@ -3785,10 +3745,10 @@
             <a:r>
               <a:rPr lang="zh-CN" sz="1200" dirty="0">
                 <a:solidFill>
-                  <a:srgbClr val="F5DC49"/>
+                  <a:srgbClr val="9B9B9B"/>
                 </a:solidFill>
                 <a:latin typeface="Manrope"/>
-                <a:ea typeface="Microsoft YaHei"/>
+                <a:ea typeface="Zen Kaku Gothic New"/>
                 <a:cs typeface="Manrope"/>
               </a:rPr>
               <a:t>03</a:t>
@@ -3798,14 +3758,14 @@
       </p:sp>
       <p:sp>
         <p:nvSpPr>
-          <p:cNvPr id="15" name="TextBox 15"/>
+          <p:cNvPr id="14" name="TextBox 14"/>
           <p:cNvSpPr txBox="1"/>
           <p:nvPr/>
         </p:nvSpPr>
         <p:spPr>
           <a:xfrm>
             <a:off x="8899208" y="3939064"/>
-            <a:ext cx="1102295" cy="259080"/>
+            <a:ext cx="1593005" cy="259080"/>
           </a:xfrm>
           <a:prstGeom prst="rect">
             <a:avLst/>
@@ -3825,20 +3785,20 @@
             <a:r>
               <a:rPr lang="zh-CN" sz="1275" dirty="0">
                 <a:solidFill>
-                  <a:srgbClr val="F5DC49"/>
-                </a:solidFill>
-                <a:latin typeface="Zen Kaku Gothic New"/>
-                <a:ea typeface="Microsoft YaHei"/>
-                <a:cs typeface="Zen Kaku Gothic New"/>
+                  <a:srgbClr val="262626"/>
+                </a:solidFill>
+                <a:latin typeface="Manrope"/>
+                <a:ea typeface="Zen Kaku Gothic New"/>
+                <a:cs typeface="Manrope"/>
               </a:rPr>
-              <a:t>四週間で試す</a:t>
-            </a:r>
-          </a:p>
-        </p:txBody>
-      </p:sp>
-      <p:sp>
-        <p:nvSpPr>
-          <p:cNvPr id="16" name="Line 16"/>
+              <a:t>四週間の試行計画</a:t>
+            </a:r>
+          </a:p>
+        </p:txBody>
+      </p:sp>
+      <p:sp>
+        <p:nvSpPr>
+          <p:cNvPr id="15" name="Line 15"/>
           <p:cNvSpPr/>
           <p:nvPr/>
         </p:nvSpPr>
@@ -3867,21 +3827,21 @@
           <a:noFill/>
           <a:ln w="9525">
             <a:solidFill>
-              <a:srgbClr val="F5DC49"/>
+              <a:srgbClr val="E7E7E7"/>
             </a:solidFill>
           </a:ln>
         </p:spPr>
       </p:sp>
       <p:sp>
         <p:nvSpPr>
-          <p:cNvPr id="17" name="TextBox 17"/>
+          <p:cNvPr id="16" name="TextBox 16"/>
           <p:cNvSpPr txBox="1"/>
           <p:nvPr/>
         </p:nvSpPr>
         <p:spPr>
           <a:xfrm>
-            <a:off x="365760" y="6366510"/>
-            <a:ext cx="3948593" cy="243840"/>
+            <a:off x="368618" y="6390799"/>
+            <a:ext cx="3903365" cy="198120"/>
           </a:xfrm>
           <a:prstGeom prst="rect">
             <a:avLst/>
@@ -3899,29 +3859,29 @@
           <a:p>
             <a:pPr algn="l"/>
             <a:r>
-              <a:rPr lang="zh-CN" sz="1200" dirty="0">
-                <a:solidFill>
-                  <a:srgbClr val="F5DC49"/>
-                </a:solidFill>
-                <a:latin typeface="Zen Kaku Gothic New"/>
-                <a:ea typeface="Microsoft YaHei"/>
-                <a:cs typeface="Zen Kaku Gothic New"/>
+              <a:rPr lang="zh-CN" sz="975" dirty="0">
+                <a:solidFill>
+                  <a:srgbClr val="9B9B9B"/>
+                </a:solidFill>
+                <a:latin typeface="Manrope"/>
+                <a:ea typeface="Zen Kaku Gothic New"/>
+                <a:cs typeface="Manrope"/>
               </a:rPr>
-              <a:t>架空のワークショップ案。実績・健康効果の主張なし。</a:t>
-            </a:r>
-          </a:p>
-        </p:txBody>
-      </p:sp>
-      <p:sp>
-        <p:nvSpPr>
-          <p:cNvPr id="18" name="TextBox 18"/>
+              <a:t>架空のワークショップ案。時間配分は例示で、効果は測定していない</a:t>
+            </a:r>
+          </a:p>
+        </p:txBody>
+      </p:sp>
+      <p:sp>
+        <p:nvSpPr>
+          <p:cNvPr id="17" name="TextBox 17"/>
           <p:cNvSpPr txBox="1"/>
           <p:nvPr/>
         </p:nvSpPr>
         <p:spPr>
           <a:xfrm>
-            <a:off x="11110564" y="6366510"/>
-            <a:ext cx="715676" cy="243840"/>
+            <a:off x="11075801" y="6390799"/>
+            <a:ext cx="747581" cy="198120"/>
           </a:xfrm>
           <a:prstGeom prst="rect">
             <a:avLst/>
@@ -3939,15 +3899,15 @@
           <a:p>
             <a:pPr algn="r"/>
             <a:r>
-              <a:rPr lang="zh-CN" sz="1200" dirty="0">
-                <a:solidFill>
-                  <a:srgbClr val="F5DC49"/>
-                </a:solidFill>
-                <a:latin typeface="Zen Kaku Gothic New"/>
-                <a:ea typeface="Microsoft YaHei"/>
-                <a:cs typeface="Zen Kaku Gothic New"/>
+              <a:rPr lang="zh-CN" sz="975" dirty="0">
+                <a:solidFill>
+                  <a:srgbClr val="9B9B9B"/>
+                </a:solidFill>
+                <a:latin typeface="Manrope"/>
+                <a:ea typeface="Zen Kaku Gothic New"/>
+                <a:cs typeface="Manrope"/>
               </a:rPr>
-              <a:t>01 / 04</a:t>
+              <a:t>試行前の案</a:t>
             </a:r>
           </a:p>
         </p:txBody>
@@ -4007,8 +3967,8 @@
         </p:nvSpPr>
         <p:spPr>
           <a:xfrm>
-            <a:off x="365760" y="99060"/>
-            <a:ext cx="499896" cy="243840"/>
+            <a:off x="370522" y="139541"/>
+            <a:ext cx="551888" cy="167640"/>
           </a:xfrm>
           <a:prstGeom prst="rect">
             <a:avLst/>
@@ -4026,15 +3986,15 @@
           <a:p>
             <a:pPr algn="l"/>
             <a:r>
-              <a:rPr lang="zh-CN" sz="1200" dirty="0">
+              <a:rPr lang="zh-CN" sz="825" dirty="0">
                 <a:solidFill>
                   <a:srgbClr val="6E6E6E"/>
                 </a:solidFill>
-                <a:latin typeface="Zen Kaku Gothic New"/>
-                <a:ea typeface="Microsoft YaHei"/>
-                <a:cs typeface="Zen Kaku Gothic New"/>
+                <a:latin typeface="Manrope"/>
+                <a:ea typeface="Zen Kaku Gothic New"/>
+                <a:cs typeface="Manrope"/>
               </a:rPr>
-              <a:t>E-03</a:t>
+              <a:t>時間配分</a:t>
             </a:r>
           </a:p>
         </p:txBody>
@@ -4054,7 +4014,7 @@
             <a:avLst/>
           </a:prstGeom>
           <a:solidFill>
-            <a:srgbClr val="3156C5"/>
+            <a:srgbClr val="336EE8"/>
           </a:solidFill>
           <a:ln>
             <a:noFill/>
@@ -4069,8 +4029,8 @@
         </p:nvSpPr>
         <p:spPr>
           <a:xfrm>
-            <a:off x="9500465" y="99060"/>
-            <a:ext cx="2325775" cy="243840"/>
+            <a:off x="11339107" y="131445"/>
+            <a:ext cx="483323" cy="182880"/>
           </a:xfrm>
           <a:prstGeom prst="rect">
             <a:avLst/>
@@ -4088,15 +4048,15 @@
           <a:p>
             <a:pPr algn="r"/>
             <a:r>
-              <a:rPr lang="zh-CN" sz="1200" b="1" dirty="0">
-                <a:solidFill>
-                  <a:srgbClr val="151B1D"/>
-                </a:solidFill>
-                <a:latin typeface="Zen Kaku Gothic New"/>
-                <a:ea typeface="Microsoft YaHei"/>
-                <a:cs typeface="Zen Kaku Gothic New"/>
+              <a:rPr lang="zh-CN" sz="900" b="1" dirty="0">
+                <a:solidFill>
+                  <a:srgbClr val="262626"/>
+                </a:solidFill>
+                <a:latin typeface="Manrope"/>
+                <a:ea typeface="Zen Kaku Gothic New"/>
+                <a:cs typeface="Manrope"/>
               </a:rPr>
-              <a:t>MORNING / WORKSHOP</a:t>
+              <a:t>朝作業</a:t>
             </a:r>
           </a:p>
         </p:txBody>
@@ -4132,7 +4092,7 @@
           <a:noFill/>
           <a:ln w="9525">
             <a:solidFill>
-              <a:srgbClr val="151B1D"/>
+              <a:srgbClr val="E7E7E7"/>
             </a:solidFill>
           </a:ln>
         </p:spPr>
@@ -4145,8 +4105,8 @@
         </p:nvSpPr>
         <p:spPr>
           <a:xfrm>
-            <a:off x="344805" y="435292"/>
-            <a:ext cx="5247337" cy="579120"/>
+            <a:off x="350520" y="483870"/>
+            <a:ext cx="5911554" cy="487680"/>
           </a:xfrm>
           <a:prstGeom prst="rect">
             <a:avLst/>
@@ -4164,15 +4124,15 @@
           <a:p>
             <a:pPr algn="l"/>
             <a:r>
-              <a:rPr lang="zh-CN" sz="2850" b="1" dirty="0">
-                <a:solidFill>
-                  <a:srgbClr val="151B1D"/>
-                </a:solidFill>
-                <a:latin typeface="Zen Kaku Gothic New"/>
-                <a:ea typeface="Microsoft YaHei"/>
-                <a:cs typeface="Zen Kaku Gothic New"/>
+              <a:rPr lang="zh-CN" sz="2400" b="1" dirty="0">
+                <a:solidFill>
+                  <a:srgbClr val="262626"/>
+                </a:solidFill>
+                <a:latin typeface="Manrope"/>
+                <a:ea typeface="Zen Kaku Gothic New"/>
+                <a:cs typeface="Manrope"/>
               </a:rPr>
-              <a:t>朝は一つ選んで、次を残す。</a:t>
+              <a:t>サンプル行程は選択から記録までを分ける</a:t>
             </a:r>
           </a:p>
         </p:txBody>
@@ -4208,125 +4168,21 @@
           <a:noFill/>
           <a:ln w="9525">
             <a:solidFill>
-              <a:srgbClr val="151B1D"/>
+              <a:srgbClr val="E7E7E7"/>
             </a:solidFill>
           </a:ln>
         </p:spPr>
       </p:sp>
       <p:sp>
         <p:nvSpPr>
-          <p:cNvPr id="9" name="Rectangle 9"/>
+          <p:cNvPr id="9" name="Line 9"/>
           <p:cNvSpPr/>
           <p:nvPr/>
         </p:nvSpPr>
         <p:spPr>
           <a:xfrm>
-            <a:off x="762000" y="2476500"/>
-            <a:ext cx="1905000" cy="952500"/>
-          </a:xfrm>
-          <a:prstGeom prst="rect">
-            <a:avLst/>
-          </a:prstGeom>
-          <a:solidFill>
-            <a:srgbClr val="F1EACF"/>
-          </a:solidFill>
-          <a:ln w="14288">
-            <a:solidFill>
-              <a:srgbClr val="9B9B9B"/>
-            </a:solidFill>
-          </a:ln>
-        </p:spPr>
-      </p:sp>
-      <p:sp>
-        <p:nvSpPr>
-          <p:cNvPr id="10" name="TextBox 10"/>
-          <p:cNvSpPr txBox="1"/>
-          <p:nvPr/>
-        </p:nvSpPr>
-        <p:spPr>
-          <a:xfrm>
-            <a:off x="1348144" y="2689860"/>
-            <a:ext cx="732712" cy="243840"/>
-          </a:xfrm>
-          <a:prstGeom prst="rect">
-            <a:avLst/>
-          </a:prstGeom>
-          <a:noFill/>
-          <a:ln>
-            <a:noFill/>
-          </a:ln>
-        </p:spPr>
-        <p:txBody>
-          <a:bodyPr wrap="none" lIns="0" tIns="0" rIns="0" bIns="0" anchor="t" anchorCtr="0">
-            <a:spAutoFit/>
-          </a:bodyPr>
-          <a:lstStyle/>
-          <a:p>
-            <a:pPr algn="ctr"/>
-            <a:r>
-              <a:rPr lang="zh-CN" sz="1200" b="1" dirty="0">
-                <a:solidFill>
-                  <a:srgbClr val="151B1D"/>
-                </a:solidFill>
-                <a:latin typeface="Zen Kaku Gothic New"/>
-                <a:ea typeface="Microsoft YaHei"/>
-                <a:cs typeface="Zen Kaku Gothic New"/>
-              </a:rPr>
-              <a:t>03 min</a:t>
-            </a:r>
-          </a:p>
-        </p:txBody>
-      </p:sp>
-      <p:sp>
-        <p:nvSpPr>
-          <p:cNvPr id="11" name="TextBox 11"/>
-          <p:cNvSpPr txBox="1"/>
-          <p:nvPr/>
-        </p:nvSpPr>
-        <p:spPr>
-          <a:xfrm>
-            <a:off x="1370214" y="2975610"/>
-            <a:ext cx="688571" cy="243840"/>
-          </a:xfrm>
-          <a:prstGeom prst="rect">
-            <a:avLst/>
-          </a:prstGeom>
-          <a:noFill/>
-          <a:ln>
-            <a:noFill/>
-          </a:ln>
-        </p:spPr>
-        <p:txBody>
-          <a:bodyPr wrap="none" lIns="0" tIns="0" rIns="0" bIns="0" anchor="t" anchorCtr="0">
-            <a:spAutoFit/>
-          </a:bodyPr>
-          <a:lstStyle/>
-          <a:p>
-            <a:pPr algn="ctr"/>
-            <a:r>
-              <a:rPr lang="zh-CN" sz="1200" b="1" dirty="0">
-                <a:solidFill>
-                  <a:srgbClr val="151B1D"/>
-                </a:solidFill>
-                <a:latin typeface="Zen Kaku Gothic New"/>
-                <a:ea typeface="Microsoft YaHei"/>
-                <a:cs typeface="Zen Kaku Gothic New"/>
-              </a:rPr>
-              <a:t>一つ選ぶ</a:t>
-            </a:r>
-          </a:p>
-        </p:txBody>
-      </p:sp>
-      <p:sp>
-        <p:nvSpPr>
-          <p:cNvPr id="12" name="Line 12"/>
-          <p:cNvSpPr/>
-          <p:nvPr/>
-        </p:nvSpPr>
-        <p:spPr>
-          <a:xfrm>
-            <a:off x="2667000" y="2952750"/>
-            <a:ext cx="476250" cy="9525"/>
+            <a:off x="1809750" y="1466850"/>
+            <a:ext cx="9525" cy="3733800"/>
           </a:xfrm>
           <a:custGeom>
             <a:avLst/>
@@ -4335,34 +4191,75 @@
             <a:cxnLst/>
             <a:rect l="l" t="t" r="r" b="b"/>
             <a:pathLst>
-              <a:path w="476250" h="9525">
+              <a:path w="9525" h="3733800">
                 <a:moveTo>
                   <a:pt x="0" y="0"/>
                 </a:moveTo>
                 <a:lnTo>
-                  <a:pt x="476250" y="0"/>
+                  <a:pt x="0" y="3733800"/>
                 </a:lnTo>
               </a:path>
             </a:pathLst>
           </a:custGeom>
           <a:noFill/>
-          <a:ln w="19050">
+          <a:ln w="4762">
             <a:solidFill>
-              <a:srgbClr val="9B9B9B"/>
+              <a:srgbClr val="E7E7E7"/>
             </a:solidFill>
-          </a:ln>
-        </p:spPr>
-      </p:sp>
-      <p:sp>
-        <p:nvSpPr>
-          <p:cNvPr id="13" name="Polygon 13"/>
+            <a:prstDash val="sysDot"/>
+          </a:ln>
+        </p:spPr>
+      </p:sp>
+      <p:sp>
+        <p:nvSpPr>
+          <p:cNvPr id="10" name="TextBox 10"/>
+          <p:cNvSpPr txBox="1"/>
+          <p:nvPr/>
+        </p:nvSpPr>
+        <p:spPr>
+          <a:xfrm>
+            <a:off x="1735833" y="1299210"/>
+            <a:ext cx="147834" cy="243840"/>
+          </a:xfrm>
+          <a:prstGeom prst="rect">
+            <a:avLst/>
+          </a:prstGeom>
+          <a:noFill/>
+          <a:ln>
+            <a:noFill/>
+          </a:ln>
+        </p:spPr>
+        <p:txBody>
+          <a:bodyPr wrap="none" lIns="0" tIns="0" rIns="0" bIns="0" anchor="t" anchorCtr="0">
+            <a:spAutoFit/>
+          </a:bodyPr>
+          <a:lstStyle/>
+          <a:p>
+            <a:pPr algn="ctr"/>
+            <a:r>
+              <a:rPr lang="zh-CN" sz="1200" dirty="0">
+                <a:solidFill>
+                  <a:srgbClr val="262626"/>
+                </a:solidFill>
+                <a:latin typeface="Manrope"/>
+                <a:ea typeface="Zen Kaku Gothic New"/>
+                <a:cs typeface="Manrope"/>
+              </a:rPr>
+              <a:t>0</a:t>
+            </a:r>
+          </a:p>
+        </p:txBody>
+      </p:sp>
+      <p:sp>
+        <p:nvSpPr>
+          <p:cNvPr id="11" name="Line 11"/>
           <p:cNvSpPr/>
           <p:nvPr/>
         </p:nvSpPr>
         <p:spPr>
           <a:xfrm>
-            <a:off x="3143250" y="2895600"/>
-            <a:ext cx="114300" cy="114300"/>
+            <a:off x="3172778" y="1466850"/>
+            <a:ext cx="9525" cy="3733800"/>
           </a:xfrm>
           <a:custGeom>
             <a:avLst/>
@@ -4371,62 +4268,35 @@
             <a:cxnLst/>
             <a:rect l="l" t="t" r="r" b="b"/>
             <a:pathLst>
-              <a:path w="114300" h="114300">
+              <a:path w="9525" h="3733800">
                 <a:moveTo>
                   <a:pt x="0" y="0"/>
                 </a:moveTo>
                 <a:lnTo>
-                  <a:pt x="114300" y="57150"/>
+                  <a:pt x="0" y="3733800"/>
                 </a:lnTo>
-                <a:lnTo>
-                  <a:pt x="0" y="114300"/>
-                </a:lnTo>
-                <a:close/>
               </a:path>
             </a:pathLst>
           </a:custGeom>
-          <a:solidFill>
-            <a:srgbClr val="151B1D"/>
-          </a:solidFill>
-          <a:ln>
-            <a:noFill/>
-          </a:ln>
-        </p:spPr>
-      </p:sp>
-      <p:sp>
-        <p:nvSpPr>
-          <p:cNvPr id="14" name="Rectangle 14"/>
-          <p:cNvSpPr/>
-          <p:nvPr/>
-        </p:nvSpPr>
-        <p:spPr>
-          <a:xfrm>
-            <a:off x="3257550" y="2476500"/>
-            <a:ext cx="1905000" cy="952500"/>
-          </a:xfrm>
-          <a:prstGeom prst="rect">
-            <a:avLst/>
-          </a:prstGeom>
-          <a:solidFill>
-            <a:srgbClr val="F1EACF"/>
-          </a:solidFill>
-          <a:ln w="14288">
+          <a:noFill/>
+          <a:ln w="4762">
             <a:solidFill>
-              <a:srgbClr val="9B9B9B"/>
+              <a:srgbClr val="E7E7E7"/>
             </a:solidFill>
-          </a:ln>
-        </p:spPr>
-      </p:sp>
-      <p:sp>
-        <p:nvSpPr>
-          <p:cNvPr id="15" name="TextBox 15"/>
+            <a:prstDash val="sysDot"/>
+          </a:ln>
+        </p:spPr>
+      </p:sp>
+      <p:sp>
+        <p:nvSpPr>
+          <p:cNvPr id="12" name="TextBox 12"/>
           <p:cNvSpPr txBox="1"/>
           <p:nvPr/>
         </p:nvSpPr>
         <p:spPr>
           <a:xfrm>
-            <a:off x="3855732" y="2689860"/>
-            <a:ext cx="708635" cy="243840"/>
+            <a:off x="3098860" y="1299210"/>
+            <a:ext cx="147834" cy="243840"/>
           </a:xfrm>
           <a:prstGeom prst="rect">
             <a:avLst/>
@@ -4444,69 +4314,29 @@
           <a:p>
             <a:pPr algn="ctr"/>
             <a:r>
-              <a:rPr lang="zh-CN" sz="1200" b="1" dirty="0">
-                <a:solidFill>
-                  <a:srgbClr val="151B1D"/>
-                </a:solidFill>
-                <a:latin typeface="Zen Kaku Gothic New"/>
-                <a:ea typeface="Microsoft YaHei"/>
-                <a:cs typeface="Zen Kaku Gothic New"/>
+              <a:rPr lang="zh-CN" sz="1200" dirty="0">
+                <a:solidFill>
+                  <a:srgbClr val="262626"/>
+                </a:solidFill>
+                <a:latin typeface="Manrope"/>
+                <a:ea typeface="Zen Kaku Gothic New"/>
+                <a:cs typeface="Manrope"/>
               </a:rPr>
-              <a:t>10 min</a:t>
-            </a:r>
-          </a:p>
-        </p:txBody>
-      </p:sp>
-      <p:sp>
-        <p:nvSpPr>
-          <p:cNvPr id="16" name="TextBox 16"/>
-          <p:cNvSpPr txBox="1"/>
-          <p:nvPr/>
-        </p:nvSpPr>
-        <p:spPr>
-          <a:xfrm>
-            <a:off x="3865764" y="2975610"/>
-            <a:ext cx="688571" cy="243840"/>
-          </a:xfrm>
-          <a:prstGeom prst="rect">
-            <a:avLst/>
-          </a:prstGeom>
-          <a:noFill/>
-          <a:ln>
-            <a:noFill/>
-          </a:ln>
-        </p:spPr>
-        <p:txBody>
-          <a:bodyPr wrap="none" lIns="0" tIns="0" rIns="0" bIns="0" anchor="t" anchorCtr="0">
-            <a:spAutoFit/>
-          </a:bodyPr>
-          <a:lstStyle/>
-          <a:p>
-            <a:pPr algn="ctr"/>
-            <a:r>
-              <a:rPr lang="zh-CN" sz="1200" b="1" dirty="0">
-                <a:solidFill>
-                  <a:srgbClr val="151B1D"/>
-                </a:solidFill>
-                <a:latin typeface="Zen Kaku Gothic New"/>
-                <a:ea typeface="Microsoft YaHei"/>
-                <a:cs typeface="Zen Kaku Gothic New"/>
-              </a:rPr>
-              <a:t>取り組む</a:t>
-            </a:r>
-          </a:p>
-        </p:txBody>
-      </p:sp>
-      <p:sp>
-        <p:nvSpPr>
-          <p:cNvPr id="17" name="Line 17"/>
+              <a:t>3</a:t>
+            </a:r>
+          </a:p>
+        </p:txBody>
+      </p:sp>
+      <p:sp>
+        <p:nvSpPr>
+          <p:cNvPr id="13" name="Line 13"/>
           <p:cNvSpPr/>
           <p:nvPr/>
         </p:nvSpPr>
         <p:spPr>
           <a:xfrm>
-            <a:off x="5162550" y="2952750"/>
-            <a:ext cx="476250" cy="9525"/>
+            <a:off x="4535805" y="1466850"/>
+            <a:ext cx="9525" cy="3733800"/>
           </a:xfrm>
           <a:custGeom>
             <a:avLst/>
@@ -4515,34 +4345,75 @@
             <a:cxnLst/>
             <a:rect l="l" t="t" r="r" b="b"/>
             <a:pathLst>
-              <a:path w="476250" h="9525">
+              <a:path w="9525" h="3733800">
                 <a:moveTo>
                   <a:pt x="0" y="0"/>
                 </a:moveTo>
                 <a:lnTo>
-                  <a:pt x="476250" y="0"/>
+                  <a:pt x="0" y="3733800"/>
                 </a:lnTo>
               </a:path>
             </a:pathLst>
           </a:custGeom>
           <a:noFill/>
-          <a:ln w="19050">
+          <a:ln w="4762">
             <a:solidFill>
-              <a:srgbClr val="9B9B9B"/>
+              <a:srgbClr val="E7E7E7"/>
             </a:solidFill>
-          </a:ln>
-        </p:spPr>
-      </p:sp>
-      <p:sp>
-        <p:nvSpPr>
-          <p:cNvPr id="18" name="Polygon 18"/>
+            <a:prstDash val="sysDot"/>
+          </a:ln>
+        </p:spPr>
+      </p:sp>
+      <p:sp>
+        <p:nvSpPr>
+          <p:cNvPr id="14" name="TextBox 14"/>
+          <p:cNvSpPr txBox="1"/>
+          <p:nvPr/>
+        </p:nvSpPr>
+        <p:spPr>
+          <a:xfrm>
+            <a:off x="4461888" y="1299210"/>
+            <a:ext cx="147834" cy="243840"/>
+          </a:xfrm>
+          <a:prstGeom prst="rect">
+            <a:avLst/>
+          </a:prstGeom>
+          <a:noFill/>
+          <a:ln>
+            <a:noFill/>
+          </a:ln>
+        </p:spPr>
+        <p:txBody>
+          <a:bodyPr wrap="none" lIns="0" tIns="0" rIns="0" bIns="0" anchor="t" anchorCtr="0">
+            <a:spAutoFit/>
+          </a:bodyPr>
+          <a:lstStyle/>
+          <a:p>
+            <a:pPr algn="ctr"/>
+            <a:r>
+              <a:rPr lang="zh-CN" sz="1200" dirty="0">
+                <a:solidFill>
+                  <a:srgbClr val="262626"/>
+                </a:solidFill>
+                <a:latin typeface="Manrope"/>
+                <a:ea typeface="Zen Kaku Gothic New"/>
+                <a:cs typeface="Manrope"/>
+              </a:rPr>
+              <a:t>6</a:t>
+            </a:r>
+          </a:p>
+        </p:txBody>
+      </p:sp>
+      <p:sp>
+        <p:nvSpPr>
+          <p:cNvPr id="15" name="Line 15"/>
           <p:cNvSpPr/>
           <p:nvPr/>
         </p:nvSpPr>
         <p:spPr>
           <a:xfrm>
-            <a:off x="5638800" y="2895600"/>
-            <a:ext cx="114300" cy="114300"/>
+            <a:off x="5898832" y="1466850"/>
+            <a:ext cx="9525" cy="3733800"/>
           </a:xfrm>
           <a:custGeom>
             <a:avLst/>
@@ -4551,62 +4422,35 @@
             <a:cxnLst/>
             <a:rect l="l" t="t" r="r" b="b"/>
             <a:pathLst>
-              <a:path w="114300" h="114300">
+              <a:path w="9525" h="3733800">
                 <a:moveTo>
                   <a:pt x="0" y="0"/>
                 </a:moveTo>
                 <a:lnTo>
-                  <a:pt x="114300" y="57150"/>
+                  <a:pt x="0" y="3733800"/>
                 </a:lnTo>
-                <a:lnTo>
-                  <a:pt x="0" y="114300"/>
-                </a:lnTo>
-                <a:close/>
               </a:path>
             </a:pathLst>
           </a:custGeom>
-          <a:solidFill>
-            <a:srgbClr val="151B1D"/>
-          </a:solidFill>
-          <a:ln>
-            <a:noFill/>
-          </a:ln>
-        </p:spPr>
-      </p:sp>
-      <p:sp>
-        <p:nvSpPr>
-          <p:cNvPr id="19" name="Rectangle 19"/>
-          <p:cNvSpPr/>
-          <p:nvPr/>
-        </p:nvSpPr>
-        <p:spPr>
-          <a:xfrm>
-            <a:off x="5753100" y="2476500"/>
-            <a:ext cx="1905000" cy="952500"/>
-          </a:xfrm>
-          <a:prstGeom prst="rect">
-            <a:avLst/>
-          </a:prstGeom>
-          <a:solidFill>
-            <a:srgbClr val="F1EACF"/>
-          </a:solidFill>
-          <a:ln w="14288">
+          <a:noFill/>
+          <a:ln w="4762">
             <a:solidFill>
-              <a:srgbClr val="9B9B9B"/>
+              <a:srgbClr val="E7E7E7"/>
             </a:solidFill>
-          </a:ln>
-        </p:spPr>
-      </p:sp>
-      <p:sp>
-        <p:nvSpPr>
-          <p:cNvPr id="20" name="TextBox 20"/>
+            <a:prstDash val="sysDot"/>
+          </a:ln>
+        </p:spPr>
+      </p:sp>
+      <p:sp>
+        <p:nvSpPr>
+          <p:cNvPr id="16" name="TextBox 16"/>
           <p:cNvSpPr txBox="1"/>
           <p:nvPr/>
         </p:nvSpPr>
         <p:spPr>
           <a:xfrm>
-            <a:off x="6339244" y="2689860"/>
-            <a:ext cx="732712" cy="243840"/>
+            <a:off x="5824915" y="1299210"/>
+            <a:ext cx="147834" cy="243840"/>
           </a:xfrm>
           <a:prstGeom prst="rect">
             <a:avLst/>
@@ -4624,69 +4468,29 @@
           <a:p>
             <a:pPr algn="ctr"/>
             <a:r>
-              <a:rPr lang="zh-CN" sz="1200" b="1" dirty="0">
-                <a:solidFill>
-                  <a:srgbClr val="151B1D"/>
-                </a:solidFill>
-                <a:latin typeface="Zen Kaku Gothic New"/>
-                <a:ea typeface="Microsoft YaHei"/>
-                <a:cs typeface="Zen Kaku Gothic New"/>
+              <a:rPr lang="zh-CN" sz="1200" dirty="0">
+                <a:solidFill>
+                  <a:srgbClr val="262626"/>
+                </a:solidFill>
+                <a:latin typeface="Manrope"/>
+                <a:ea typeface="Zen Kaku Gothic New"/>
+                <a:cs typeface="Manrope"/>
               </a:rPr>
-              <a:t>05 min</a:t>
-            </a:r>
-          </a:p>
-        </p:txBody>
-      </p:sp>
-      <p:sp>
-        <p:nvSpPr>
-          <p:cNvPr id="21" name="TextBox 21"/>
-          <p:cNvSpPr txBox="1"/>
-          <p:nvPr/>
-        </p:nvSpPr>
-        <p:spPr>
-          <a:xfrm>
-            <a:off x="6441569" y="2975610"/>
-            <a:ext cx="528061" cy="243840"/>
-          </a:xfrm>
-          <a:prstGeom prst="rect">
-            <a:avLst/>
-          </a:prstGeom>
-          <a:noFill/>
-          <a:ln>
-            <a:noFill/>
-          </a:ln>
-        </p:spPr>
-        <p:txBody>
-          <a:bodyPr wrap="none" lIns="0" tIns="0" rIns="0" bIns="0" anchor="t" anchorCtr="0">
-            <a:spAutoFit/>
-          </a:bodyPr>
-          <a:lstStyle/>
-          <a:p>
-            <a:pPr algn="ctr"/>
-            <a:r>
-              <a:rPr lang="zh-CN" sz="1200" b="1" dirty="0">
-                <a:solidFill>
-                  <a:srgbClr val="151B1D"/>
-                </a:solidFill>
-                <a:latin typeface="Zen Kaku Gothic New"/>
-                <a:ea typeface="Microsoft YaHei"/>
-                <a:cs typeface="Zen Kaku Gothic New"/>
-              </a:rPr>
-              <a:t>メモする</a:t>
-            </a:r>
-          </a:p>
-        </p:txBody>
-      </p:sp>
-      <p:sp>
-        <p:nvSpPr>
-          <p:cNvPr id="22" name="Line 22"/>
+              <a:t>9</a:t>
+            </a:r>
+          </a:p>
+        </p:txBody>
+      </p:sp>
+      <p:sp>
+        <p:nvSpPr>
+          <p:cNvPr id="17" name="Line 17"/>
           <p:cNvSpPr/>
           <p:nvPr/>
         </p:nvSpPr>
         <p:spPr>
           <a:xfrm>
-            <a:off x="7658100" y="2952750"/>
-            <a:ext cx="476250" cy="9525"/>
+            <a:off x="7261860" y="1466850"/>
+            <a:ext cx="9525" cy="3733800"/>
           </a:xfrm>
           <a:custGeom>
             <a:avLst/>
@@ -4695,34 +4499,75 @@
             <a:cxnLst/>
             <a:rect l="l" t="t" r="r" b="b"/>
             <a:pathLst>
-              <a:path w="476250" h="9525">
+              <a:path w="9525" h="3733800">
                 <a:moveTo>
                   <a:pt x="0" y="0"/>
                 </a:moveTo>
                 <a:lnTo>
-                  <a:pt x="476250" y="0"/>
+                  <a:pt x="0" y="3733800"/>
                 </a:lnTo>
               </a:path>
             </a:pathLst>
           </a:custGeom>
           <a:noFill/>
-          <a:ln w="19050">
+          <a:ln w="4762">
             <a:solidFill>
-              <a:srgbClr val="9B9B9B"/>
+              <a:srgbClr val="E7E7E7"/>
             </a:solidFill>
-          </a:ln>
-        </p:spPr>
-      </p:sp>
-      <p:sp>
-        <p:nvSpPr>
-          <p:cNvPr id="23" name="Polygon 23"/>
+            <a:prstDash val="sysDot"/>
+          </a:ln>
+        </p:spPr>
+      </p:sp>
+      <p:sp>
+        <p:nvSpPr>
+          <p:cNvPr id="18" name="TextBox 18"/>
+          <p:cNvSpPr txBox="1"/>
+          <p:nvPr/>
+        </p:nvSpPr>
+        <p:spPr>
+          <a:xfrm>
+            <a:off x="7140623" y="1299210"/>
+            <a:ext cx="242474" cy="243840"/>
+          </a:xfrm>
+          <a:prstGeom prst="rect">
+            <a:avLst/>
+          </a:prstGeom>
+          <a:noFill/>
+          <a:ln>
+            <a:noFill/>
+          </a:ln>
+        </p:spPr>
+        <p:txBody>
+          <a:bodyPr wrap="none" lIns="0" tIns="0" rIns="0" bIns="0" anchor="t" anchorCtr="0">
+            <a:spAutoFit/>
+          </a:bodyPr>
+          <a:lstStyle/>
+          <a:p>
+            <a:pPr algn="ctr"/>
+            <a:r>
+              <a:rPr lang="zh-CN" sz="1200" dirty="0">
+                <a:solidFill>
+                  <a:srgbClr val="262626"/>
+                </a:solidFill>
+                <a:latin typeface="Manrope"/>
+                <a:ea typeface="Zen Kaku Gothic New"/>
+                <a:cs typeface="Manrope"/>
+              </a:rPr>
+              <a:t>12</a:t>
+            </a:r>
+          </a:p>
+        </p:txBody>
+      </p:sp>
+      <p:sp>
+        <p:nvSpPr>
+          <p:cNvPr id="19" name="Line 19"/>
           <p:cNvSpPr/>
           <p:nvPr/>
         </p:nvSpPr>
         <p:spPr>
           <a:xfrm>
-            <a:off x="8134350" y="2895600"/>
-            <a:ext cx="114300" cy="114300"/>
+            <a:off x="8624888" y="1466850"/>
+            <a:ext cx="9525" cy="3733800"/>
           </a:xfrm>
           <a:custGeom>
             <a:avLst/>
@@ -4731,60 +4576,35 @@
             <a:cxnLst/>
             <a:rect l="l" t="t" r="r" b="b"/>
             <a:pathLst>
-              <a:path w="114300" h="114300">
+              <a:path w="9525" h="3733800">
                 <a:moveTo>
                   <a:pt x="0" y="0"/>
                 </a:moveTo>
                 <a:lnTo>
-                  <a:pt x="114300" y="57150"/>
+                  <a:pt x="0" y="3733800"/>
                 </a:lnTo>
-                <a:lnTo>
-                  <a:pt x="0" y="114300"/>
-                </a:lnTo>
-                <a:close/>
               </a:path>
             </a:pathLst>
           </a:custGeom>
-          <a:solidFill>
-            <a:srgbClr val="151B1D"/>
-          </a:solidFill>
-          <a:ln>
-            <a:noFill/>
-          </a:ln>
-        </p:spPr>
-      </p:sp>
-      <p:sp>
-        <p:nvSpPr>
-          <p:cNvPr id="24" name="Rectangle 24"/>
-          <p:cNvSpPr/>
-          <p:nvPr/>
-        </p:nvSpPr>
-        <p:spPr>
-          <a:xfrm>
-            <a:off x="8248650" y="2476500"/>
-            <a:ext cx="1905000" cy="952500"/>
-          </a:xfrm>
-          <a:prstGeom prst="rect">
-            <a:avLst/>
-          </a:prstGeom>
-          <a:solidFill>
-            <a:srgbClr val="151B1D"/>
-          </a:solidFill>
-          <a:ln>
-            <a:noFill/>
-          </a:ln>
-        </p:spPr>
-      </p:sp>
-      <p:sp>
-        <p:nvSpPr>
-          <p:cNvPr id="25" name="TextBox 25"/>
+          <a:noFill/>
+          <a:ln w="4762">
+            <a:solidFill>
+              <a:srgbClr val="E7E7E7"/>
+            </a:solidFill>
+            <a:prstDash val="sysDot"/>
+          </a:ln>
+        </p:spPr>
+      </p:sp>
+      <p:sp>
+        <p:nvSpPr>
+          <p:cNvPr id="20" name="TextBox 20"/>
           <p:cNvSpPr txBox="1"/>
           <p:nvPr/>
         </p:nvSpPr>
         <p:spPr>
           <a:xfrm>
-            <a:off x="8834794" y="2689860"/>
-            <a:ext cx="732712" cy="243840"/>
+            <a:off x="8503650" y="1299210"/>
+            <a:ext cx="242474" cy="243840"/>
           </a:xfrm>
           <a:prstGeom prst="rect">
             <a:avLst/>
@@ -4802,149 +4622,29 @@
           <a:p>
             <a:pPr algn="ctr"/>
             <a:r>
-              <a:rPr lang="zh-CN" sz="1200" b="1" dirty="0">
-                <a:solidFill>
-                  <a:srgbClr val="C4C4C4"/>
-                </a:solidFill>
-                <a:latin typeface="Zen Kaku Gothic New"/>
-                <a:ea typeface="Microsoft YaHei"/>
-                <a:cs typeface="Zen Kaku Gothic New"/>
+              <a:rPr lang="zh-CN" sz="1200" dirty="0">
+                <a:solidFill>
+                  <a:srgbClr val="262626"/>
+                </a:solidFill>
+                <a:latin typeface="Manrope"/>
+                <a:ea typeface="Zen Kaku Gothic New"/>
+                <a:cs typeface="Manrope"/>
               </a:rPr>
-              <a:t>02 min</a:t>
-            </a:r>
-          </a:p>
-        </p:txBody>
-      </p:sp>
-      <p:sp>
-        <p:nvSpPr>
-          <p:cNvPr id="26" name="TextBox 26"/>
-          <p:cNvSpPr txBox="1"/>
-          <p:nvPr/>
-        </p:nvSpPr>
-        <p:spPr>
-          <a:xfrm>
-            <a:off x="8856864" y="2975610"/>
-            <a:ext cx="688571" cy="243840"/>
-          </a:xfrm>
-          <a:prstGeom prst="rect">
-            <a:avLst/>
-          </a:prstGeom>
-          <a:noFill/>
-          <a:ln>
-            <a:noFill/>
-          </a:ln>
-        </p:spPr>
-        <p:txBody>
-          <a:bodyPr wrap="none" lIns="0" tIns="0" rIns="0" bIns="0" anchor="t" anchorCtr="0">
-            <a:spAutoFit/>
-          </a:bodyPr>
-          <a:lstStyle/>
-          <a:p>
-            <a:pPr algn="ctr"/>
-            <a:r>
-              <a:rPr lang="zh-CN" sz="1200" b="1" dirty="0">
-                <a:solidFill>
-                  <a:srgbClr val="FFFFFF"/>
-                </a:solidFill>
-                <a:latin typeface="Zen Kaku Gothic New"/>
-                <a:ea typeface="Microsoft YaHei"/>
-                <a:cs typeface="Zen Kaku Gothic New"/>
-              </a:rPr>
-              <a:t>次を残す</a:t>
-            </a:r>
-          </a:p>
-        </p:txBody>
-      </p:sp>
-      <p:sp>
-        <p:nvSpPr>
-          <p:cNvPr id="27" name="TextBox 27"/>
-          <p:cNvSpPr txBox="1"/>
-          <p:nvPr/>
-        </p:nvSpPr>
-        <p:spPr>
-          <a:xfrm>
-            <a:off x="724852" y="4160996"/>
-            <a:ext cx="4690967" cy="594360"/>
-          </a:xfrm>
-          <a:prstGeom prst="rect">
-            <a:avLst/>
-          </a:prstGeom>
-          <a:noFill/>
-          <a:ln>
-            <a:noFill/>
-          </a:ln>
-        </p:spPr>
-        <p:txBody>
-          <a:bodyPr wrap="none" lIns="0" tIns="0" rIns="0" bIns="0" anchor="t" anchorCtr="0">
-            <a:spAutoFit/>
-          </a:bodyPr>
-          <a:lstStyle/>
-          <a:p>
-            <a:pPr algn="l"/>
-            <a:r>
-              <a:rPr lang="zh-CN" sz="2925" b="1" dirty="0">
-                <a:solidFill>
-                  <a:srgbClr val="151B1D"/>
-                </a:solidFill>
-                <a:latin typeface="Zen Kaku Gothic New"/>
-                <a:ea typeface="Microsoft YaHei"/>
-                <a:cs typeface="Zen Kaku Gothic New"/>
-              </a:rPr>
-              <a:t>20分の、サンプル行程。</a:t>
-            </a:r>
-          </a:p>
-        </p:txBody>
-      </p:sp>
-      <p:sp>
-        <p:nvSpPr>
-          <p:cNvPr id="28" name="TextBox 28"/>
-          <p:cNvSpPr txBox="1"/>
-          <p:nvPr/>
-        </p:nvSpPr>
-        <p:spPr>
-          <a:xfrm>
-            <a:off x="740092" y="4814411"/>
-            <a:ext cx="6726374" cy="350520"/>
-          </a:xfrm>
-          <a:prstGeom prst="rect">
-            <a:avLst/>
-          </a:prstGeom>
-          <a:noFill/>
-          <a:ln>
-            <a:noFill/>
-          </a:ln>
-        </p:spPr>
-        <p:txBody>
-          <a:bodyPr wrap="none" lIns="0" tIns="0" rIns="0" bIns="0" anchor="t" anchorCtr="0">
-            <a:spAutoFit/>
-          </a:bodyPr>
-          <a:lstStyle/>
-          <a:p>
-            <a:pPr algn="l"/>
-            <a:r>
-              <a:rPr lang="zh-CN" sz="1725" dirty="0">
-                <a:solidFill>
-                  <a:srgbClr val="6E6E6E"/>
-                </a:solidFill>
-                <a:latin typeface="Zen Kaku Gothic New"/>
-                <a:ea typeface="Microsoft YaHei"/>
-                <a:cs typeface="Zen Kaku Gothic New"/>
-              </a:rPr>
-              <a:t>時間配分は目安。仕事内容に合わせて、長さと順番を変える。</a:t>
-            </a:r>
-          </a:p>
-        </p:txBody>
-      </p:sp>
-      <p:sp>
-        <p:nvSpPr>
-          <p:cNvPr id="29" name="Line 29"/>
+              <a:t>15</a:t>
+            </a:r>
+          </a:p>
+        </p:txBody>
+      </p:sp>
+      <p:sp>
+        <p:nvSpPr>
+          <p:cNvPr id="21" name="Line 21"/>
           <p:cNvSpPr/>
           <p:nvPr/>
         </p:nvSpPr>
         <p:spPr>
           <a:xfrm>
-            <a:off x="762000" y="5524500"/>
-            <a:ext cx="10191750" cy="9525"/>
+            <a:off x="9987915" y="1466850"/>
+            <a:ext cx="9525" cy="3733800"/>
           </a:xfrm>
           <a:custGeom>
             <a:avLst/>
@@ -4953,34 +4653,35 @@
             <a:cxnLst/>
             <a:rect l="l" t="t" r="r" b="b"/>
             <a:pathLst>
-              <a:path w="10191750" h="9525">
+              <a:path w="9525" h="3733800">
                 <a:moveTo>
                   <a:pt x="0" y="0"/>
                 </a:moveTo>
                 <a:lnTo>
-                  <a:pt x="10191750" y="0"/>
+                  <a:pt x="0" y="3733800"/>
                 </a:lnTo>
               </a:path>
             </a:pathLst>
           </a:custGeom>
           <a:noFill/>
-          <a:ln w="14288">
+          <a:ln w="4762">
             <a:solidFill>
-              <a:srgbClr val="151B1D"/>
+              <a:srgbClr val="E7E7E7"/>
             </a:solidFill>
-          </a:ln>
-        </p:spPr>
-      </p:sp>
-      <p:sp>
-        <p:nvSpPr>
-          <p:cNvPr id="30" name="TextBox 30"/>
+            <a:prstDash val="sysDot"/>
+          </a:ln>
+        </p:spPr>
+      </p:sp>
+      <p:sp>
+        <p:nvSpPr>
+          <p:cNvPr id="22" name="TextBox 22"/>
           <p:cNvSpPr txBox="1"/>
           <p:nvPr/>
         </p:nvSpPr>
         <p:spPr>
           <a:xfrm>
-            <a:off x="743902" y="5789771"/>
-            <a:ext cx="3034639" cy="289560"/>
+            <a:off x="9866678" y="1299210"/>
+            <a:ext cx="242474" cy="243840"/>
           </a:xfrm>
           <a:prstGeom prst="rect">
             <a:avLst/>
@@ -4996,24 +4697,557 @@
           </a:bodyPr>
           <a:lstStyle/>
           <a:p>
+            <a:pPr algn="ctr"/>
+            <a:r>
+              <a:rPr lang="zh-CN" sz="1200" dirty="0">
+                <a:solidFill>
+                  <a:srgbClr val="262626"/>
+                </a:solidFill>
+                <a:latin typeface="Manrope"/>
+                <a:ea typeface="Zen Kaku Gothic New"/>
+                <a:cs typeface="Manrope"/>
+              </a:rPr>
+              <a:t>18</a:t>
+            </a:r>
+          </a:p>
+        </p:txBody>
+      </p:sp>
+      <p:sp>
+        <p:nvSpPr>
+          <p:cNvPr id="23" name="TextBox 23"/>
+          <p:cNvSpPr txBox="1"/>
+          <p:nvPr/>
+        </p:nvSpPr>
+        <p:spPr>
+          <a:xfrm>
+            <a:off x="866303" y="1875472"/>
+            <a:ext cx="844387" cy="243840"/>
+          </a:xfrm>
+          <a:prstGeom prst="rect">
+            <a:avLst/>
+          </a:prstGeom>
+          <a:noFill/>
+          <a:ln>
+            <a:noFill/>
+          </a:ln>
+        </p:spPr>
+        <p:txBody>
+          <a:bodyPr wrap="none" lIns="0" tIns="0" rIns="0" bIns="0" anchor="t" anchorCtr="0">
+            <a:spAutoFit/>
+          </a:bodyPr>
+          <a:lstStyle/>
+          <a:p>
+            <a:pPr algn="r"/>
+            <a:r>
+              <a:rPr lang="zh-CN" sz="1200" dirty="0">
+                <a:solidFill>
+                  <a:srgbClr val="262626"/>
+                </a:solidFill>
+                <a:latin typeface="Manrope"/>
+                <a:ea typeface="Zen Kaku Gothic New"/>
+                <a:cs typeface="Manrope"/>
+              </a:rPr>
+              <a:t>作業を選ぶ</a:t>
+            </a:r>
+          </a:p>
+        </p:txBody>
+      </p:sp>
+      <p:sp>
+        <p:nvSpPr>
+          <p:cNvPr id="24" name="Rectangle 24"/>
+          <p:cNvSpPr/>
+          <p:nvPr/>
+        </p:nvSpPr>
+        <p:spPr>
+          <a:xfrm>
+            <a:off x="1809750" y="1862138"/>
+            <a:ext cx="1363028" cy="209550"/>
+          </a:xfrm>
+          <a:prstGeom prst="rect">
+            <a:avLst/>
+          </a:prstGeom>
+          <a:solidFill>
+            <a:srgbClr val="9B9B9B"/>
+          </a:solidFill>
+          <a:ln w="9525">
+            <a:solidFill>
+              <a:srgbClr val="6E6E6E"/>
+            </a:solidFill>
+          </a:ln>
+        </p:spPr>
+      </p:sp>
+      <p:sp>
+        <p:nvSpPr>
+          <p:cNvPr id="25" name="TextBox 25"/>
+          <p:cNvSpPr txBox="1"/>
+          <p:nvPr/>
+        </p:nvSpPr>
+        <p:spPr>
+          <a:xfrm>
+            <a:off x="3214688" y="1875472"/>
+            <a:ext cx="340901" cy="243840"/>
+          </a:xfrm>
+          <a:prstGeom prst="rect">
+            <a:avLst/>
+          </a:prstGeom>
+          <a:noFill/>
+          <a:ln>
+            <a:noFill/>
+          </a:ln>
+        </p:spPr>
+        <p:txBody>
+          <a:bodyPr wrap="none" lIns="0" tIns="0" rIns="0" bIns="0" anchor="t" anchorCtr="0">
+            <a:spAutoFit/>
+          </a:bodyPr>
+          <a:lstStyle/>
+          <a:p>
             <a:pPr algn="l"/>
             <a:r>
-              <a:rPr lang="zh-CN" sz="1425" dirty="0">
-                <a:solidFill>
-                  <a:srgbClr val="6E6E6E"/>
-                </a:solidFill>
-                <a:latin typeface="Zen Kaku Gothic New"/>
-                <a:ea typeface="Microsoft YaHei"/>
-                <a:cs typeface="Zen Kaku Gothic New"/>
+              <a:rPr lang="zh-CN" sz="1200" dirty="0">
+                <a:solidFill>
+                  <a:srgbClr val="262626"/>
+                </a:solidFill>
+                <a:latin typeface="Manrope"/>
+                <a:ea typeface="Zen Kaku Gothic New"/>
+                <a:cs typeface="Manrope"/>
               </a:rPr>
-              <a:t>改善の実績を示す図ではありません。</a:t>
-            </a:r>
-          </a:p>
-        </p:txBody>
-      </p:sp>
-      <p:sp>
-        <p:nvSpPr>
-          <p:cNvPr id="31" name="Line 31"/>
+              <a:t>3分</a:t>
+            </a:r>
+          </a:p>
+        </p:txBody>
+      </p:sp>
+      <p:sp>
+        <p:nvSpPr>
+          <p:cNvPr id="26" name="TextBox 26"/>
+          <p:cNvSpPr txBox="1"/>
+          <p:nvPr/>
+        </p:nvSpPr>
+        <p:spPr>
+          <a:xfrm>
+            <a:off x="555882" y="2799398"/>
+            <a:ext cx="1154808" cy="243840"/>
+          </a:xfrm>
+          <a:prstGeom prst="rect">
+            <a:avLst/>
+          </a:prstGeom>
+          <a:noFill/>
+          <a:ln>
+            <a:noFill/>
+          </a:ln>
+        </p:spPr>
+        <p:txBody>
+          <a:bodyPr wrap="none" lIns="0" tIns="0" rIns="0" bIns="0" anchor="t" anchorCtr="0">
+            <a:spAutoFit/>
+          </a:bodyPr>
+          <a:lstStyle/>
+          <a:p>
+            <a:pPr algn="r"/>
+            <a:r>
+              <a:rPr lang="zh-CN" sz="1200" dirty="0">
+                <a:solidFill>
+                  <a:srgbClr val="262626"/>
+                </a:solidFill>
+                <a:latin typeface="Manrope"/>
+                <a:ea typeface="Zen Kaku Gothic New"/>
+                <a:cs typeface="Manrope"/>
+              </a:rPr>
+              <a:t>作業に取り組む</a:t>
+            </a:r>
+          </a:p>
+        </p:txBody>
+      </p:sp>
+      <p:sp>
+        <p:nvSpPr>
+          <p:cNvPr id="27" name="Rectangle 27"/>
+          <p:cNvSpPr/>
+          <p:nvPr/>
+        </p:nvSpPr>
+        <p:spPr>
+          <a:xfrm>
+            <a:off x="3172778" y="2786062"/>
+            <a:ext cx="4543425" cy="209550"/>
+          </a:xfrm>
+          <a:prstGeom prst="rect">
+            <a:avLst/>
+          </a:prstGeom>
+          <a:solidFill>
+            <a:srgbClr val="336EE8"/>
+          </a:solidFill>
+          <a:ln w="9525">
+            <a:solidFill>
+              <a:srgbClr val="6E6E6E"/>
+            </a:solidFill>
+          </a:ln>
+        </p:spPr>
+      </p:sp>
+      <p:sp>
+        <p:nvSpPr>
+          <p:cNvPr id="28" name="TextBox 28"/>
+          <p:cNvSpPr txBox="1"/>
+          <p:nvPr/>
+        </p:nvSpPr>
+        <p:spPr>
+          <a:xfrm>
+            <a:off x="7758112" y="2799398"/>
+            <a:ext cx="435541" cy="243840"/>
+          </a:xfrm>
+          <a:prstGeom prst="rect">
+            <a:avLst/>
+          </a:prstGeom>
+          <a:noFill/>
+          <a:ln>
+            <a:noFill/>
+          </a:ln>
+        </p:spPr>
+        <p:txBody>
+          <a:bodyPr wrap="none" lIns="0" tIns="0" rIns="0" bIns="0" anchor="t" anchorCtr="0">
+            <a:spAutoFit/>
+          </a:bodyPr>
+          <a:lstStyle/>
+          <a:p>
+            <a:pPr algn="l"/>
+            <a:r>
+              <a:rPr lang="zh-CN" sz="1200" dirty="0">
+                <a:solidFill>
+                  <a:srgbClr val="262626"/>
+                </a:solidFill>
+                <a:latin typeface="Manrope"/>
+                <a:ea typeface="Zen Kaku Gothic New"/>
+                <a:cs typeface="Manrope"/>
+              </a:rPr>
+              <a:t>10分</a:t>
+            </a:r>
+          </a:p>
+        </p:txBody>
+      </p:sp>
+      <p:sp>
+        <p:nvSpPr>
+          <p:cNvPr id="29" name="TextBox 29"/>
+          <p:cNvSpPr txBox="1"/>
+          <p:nvPr/>
+        </p:nvSpPr>
+        <p:spPr>
+          <a:xfrm>
+            <a:off x="631594" y="3723322"/>
+            <a:ext cx="1079096" cy="243840"/>
+          </a:xfrm>
+          <a:prstGeom prst="rect">
+            <a:avLst/>
+          </a:prstGeom>
+          <a:noFill/>
+          <a:ln>
+            <a:noFill/>
+          </a:ln>
+        </p:spPr>
+        <p:txBody>
+          <a:bodyPr wrap="none" lIns="0" tIns="0" rIns="0" bIns="0" anchor="t" anchorCtr="0">
+            <a:spAutoFit/>
+          </a:bodyPr>
+          <a:lstStyle/>
+          <a:p>
+            <a:pPr algn="r"/>
+            <a:r>
+              <a:rPr lang="zh-CN" sz="1200" dirty="0">
+                <a:solidFill>
+                  <a:srgbClr val="262626"/>
+                </a:solidFill>
+                <a:latin typeface="Manrope"/>
+                <a:ea typeface="Zen Kaku Gothic New"/>
+                <a:cs typeface="Manrope"/>
+              </a:rPr>
+              <a:t>進み具合をメモ</a:t>
+            </a:r>
+          </a:p>
+        </p:txBody>
+      </p:sp>
+      <p:sp>
+        <p:nvSpPr>
+          <p:cNvPr id="30" name="Rectangle 30"/>
+          <p:cNvSpPr/>
+          <p:nvPr/>
+        </p:nvSpPr>
+        <p:spPr>
+          <a:xfrm>
+            <a:off x="7716202" y="3709988"/>
+            <a:ext cx="2271712" cy="209550"/>
+          </a:xfrm>
+          <a:prstGeom prst="rect">
+            <a:avLst/>
+          </a:prstGeom>
+          <a:solidFill>
+            <a:srgbClr val="9B9B9B"/>
+          </a:solidFill>
+          <a:ln w="9525">
+            <a:solidFill>
+              <a:srgbClr val="6E6E6E"/>
+            </a:solidFill>
+          </a:ln>
+        </p:spPr>
+      </p:sp>
+      <p:sp>
+        <p:nvSpPr>
+          <p:cNvPr id="31" name="TextBox 31"/>
+          <p:cNvSpPr txBox="1"/>
+          <p:nvPr/>
+        </p:nvSpPr>
+        <p:spPr>
+          <a:xfrm>
+            <a:off x="10029825" y="3723322"/>
+            <a:ext cx="340901" cy="243840"/>
+          </a:xfrm>
+          <a:prstGeom prst="rect">
+            <a:avLst/>
+          </a:prstGeom>
+          <a:noFill/>
+          <a:ln>
+            <a:noFill/>
+          </a:ln>
+        </p:spPr>
+        <p:txBody>
+          <a:bodyPr wrap="none" lIns="0" tIns="0" rIns="0" bIns="0" anchor="t" anchorCtr="0">
+            <a:spAutoFit/>
+          </a:bodyPr>
+          <a:lstStyle/>
+          <a:p>
+            <a:pPr algn="l"/>
+            <a:r>
+              <a:rPr lang="zh-CN" sz="1200" dirty="0">
+                <a:solidFill>
+                  <a:srgbClr val="262626"/>
+                </a:solidFill>
+                <a:latin typeface="Manrope"/>
+                <a:ea typeface="Zen Kaku Gothic New"/>
+                <a:cs typeface="Manrope"/>
+              </a:rPr>
+              <a:t>5分</a:t>
+            </a:r>
+          </a:p>
+        </p:txBody>
+      </p:sp>
+      <p:sp>
+        <p:nvSpPr>
+          <p:cNvPr id="32" name="TextBox 32"/>
+          <p:cNvSpPr txBox="1"/>
+          <p:nvPr/>
+        </p:nvSpPr>
+        <p:spPr>
+          <a:xfrm>
+            <a:off x="555882" y="4647248"/>
+            <a:ext cx="1154808" cy="243840"/>
+          </a:xfrm>
+          <a:prstGeom prst="rect">
+            <a:avLst/>
+          </a:prstGeom>
+          <a:noFill/>
+          <a:ln>
+            <a:noFill/>
+          </a:ln>
+        </p:spPr>
+        <p:txBody>
+          <a:bodyPr wrap="none" lIns="0" tIns="0" rIns="0" bIns="0" anchor="t" anchorCtr="0">
+            <a:spAutoFit/>
+          </a:bodyPr>
+          <a:lstStyle/>
+          <a:p>
+            <a:pPr algn="r"/>
+            <a:r>
+              <a:rPr lang="zh-CN" sz="1200" dirty="0">
+                <a:solidFill>
+                  <a:srgbClr val="262626"/>
+                </a:solidFill>
+                <a:latin typeface="Manrope"/>
+                <a:ea typeface="Zen Kaku Gothic New"/>
+                <a:cs typeface="Manrope"/>
+              </a:rPr>
+              <a:t>次の手順を書く</a:t>
+            </a:r>
+          </a:p>
+        </p:txBody>
+      </p:sp>
+      <p:sp>
+        <p:nvSpPr>
+          <p:cNvPr id="33" name="Rectangle 33"/>
+          <p:cNvSpPr/>
+          <p:nvPr/>
+        </p:nvSpPr>
+        <p:spPr>
+          <a:xfrm>
+            <a:off x="9987915" y="4633912"/>
+            <a:ext cx="908685" cy="209550"/>
+          </a:xfrm>
+          <a:prstGeom prst="rect">
+            <a:avLst/>
+          </a:prstGeom>
+          <a:solidFill>
+            <a:srgbClr val="9B9B9B"/>
+          </a:solidFill>
+          <a:ln w="9525">
+            <a:solidFill>
+              <a:srgbClr val="6E6E6E"/>
+            </a:solidFill>
+          </a:ln>
+        </p:spPr>
+      </p:sp>
+      <p:sp>
+        <p:nvSpPr>
+          <p:cNvPr id="34" name="TextBox 34"/>
+          <p:cNvSpPr txBox="1"/>
+          <p:nvPr/>
+        </p:nvSpPr>
+        <p:spPr>
+          <a:xfrm>
+            <a:off x="10938510" y="4647248"/>
+            <a:ext cx="340901" cy="243840"/>
+          </a:xfrm>
+          <a:prstGeom prst="rect">
+            <a:avLst/>
+          </a:prstGeom>
+          <a:noFill/>
+          <a:ln>
+            <a:noFill/>
+          </a:ln>
+        </p:spPr>
+        <p:txBody>
+          <a:bodyPr wrap="none" lIns="0" tIns="0" rIns="0" bIns="0" anchor="t" anchorCtr="0">
+            <a:spAutoFit/>
+          </a:bodyPr>
+          <a:lstStyle/>
+          <a:p>
+            <a:pPr algn="l"/>
+            <a:r>
+              <a:rPr lang="zh-CN" sz="1200" dirty="0">
+                <a:solidFill>
+                  <a:srgbClr val="262626"/>
+                </a:solidFill>
+                <a:latin typeface="Manrope"/>
+                <a:ea typeface="Zen Kaku Gothic New"/>
+                <a:cs typeface="Manrope"/>
+              </a:rPr>
+              <a:t>2分</a:t>
+            </a:r>
+          </a:p>
+        </p:txBody>
+      </p:sp>
+      <p:sp>
+        <p:nvSpPr>
+          <p:cNvPr id="35" name="Line 35"/>
+          <p:cNvSpPr/>
+          <p:nvPr/>
+        </p:nvSpPr>
+        <p:spPr>
+          <a:xfrm>
+            <a:off x="10896600" y="1466850"/>
+            <a:ext cx="9525" cy="3733800"/>
+          </a:xfrm>
+          <a:custGeom>
+            <a:avLst/>
+            <a:gdLst/>
+            <a:ahLst/>
+            <a:cxnLst/>
+            <a:rect l="l" t="t" r="r" b="b"/>
+            <a:pathLst>
+              <a:path w="9525" h="3733800">
+                <a:moveTo>
+                  <a:pt x="0" y="0"/>
+                </a:moveTo>
+                <a:lnTo>
+                  <a:pt x="0" y="3733800"/>
+                </a:lnTo>
+              </a:path>
+            </a:pathLst>
+          </a:custGeom>
+          <a:noFill/>
+          <a:ln w="4762">
+            <a:solidFill>
+              <a:srgbClr val="E7E7E7"/>
+            </a:solidFill>
+            <a:prstDash val="sysDot"/>
+          </a:ln>
+        </p:spPr>
+      </p:sp>
+      <p:sp>
+        <p:nvSpPr>
+          <p:cNvPr id="36" name="TextBox 36"/>
+          <p:cNvSpPr txBox="1"/>
+          <p:nvPr/>
+        </p:nvSpPr>
+        <p:spPr>
+          <a:xfrm>
+            <a:off x="10764006" y="1299210"/>
+            <a:ext cx="265188" cy="243840"/>
+          </a:xfrm>
+          <a:prstGeom prst="rect">
+            <a:avLst/>
+          </a:prstGeom>
+          <a:noFill/>
+          <a:ln>
+            <a:noFill/>
+          </a:ln>
+        </p:spPr>
+        <p:txBody>
+          <a:bodyPr wrap="none" lIns="0" tIns="0" rIns="0" bIns="0" anchor="t" anchorCtr="0">
+            <a:spAutoFit/>
+          </a:bodyPr>
+          <a:lstStyle/>
+          <a:p>
+            <a:pPr algn="ctr"/>
+            <a:r>
+              <a:rPr lang="zh-CN" sz="1200" dirty="0">
+                <a:solidFill>
+                  <a:srgbClr val="262626"/>
+                </a:solidFill>
+                <a:latin typeface="Manrope"/>
+                <a:ea typeface="Zen Kaku Gothic New"/>
+                <a:cs typeface="Manrope"/>
+              </a:rPr>
+              <a:t>20</a:t>
+            </a:r>
+          </a:p>
+        </p:txBody>
+      </p:sp>
+      <p:sp>
+        <p:nvSpPr>
+          <p:cNvPr id="37" name="TextBox 37"/>
+          <p:cNvSpPr txBox="1"/>
+          <p:nvPr/>
+        </p:nvSpPr>
+        <p:spPr>
+          <a:xfrm>
+            <a:off x="519112" y="6126956"/>
+            <a:ext cx="3964433" cy="228600"/>
+          </a:xfrm>
+          <a:prstGeom prst="rect">
+            <a:avLst/>
+          </a:prstGeom>
+          <a:noFill/>
+          <a:ln>
+            <a:noFill/>
+          </a:ln>
+        </p:spPr>
+        <p:txBody>
+          <a:bodyPr wrap="none" lIns="0" tIns="0" rIns="0" bIns="0" anchor="t" anchorCtr="0">
+            <a:spAutoFit/>
+          </a:bodyPr>
+          <a:lstStyle/>
+          <a:p>
+            <a:pPr algn="l"/>
+            <a:r>
+              <a:rPr lang="zh-CN" sz="1125" dirty="0">
+                <a:solidFill>
+                  <a:srgbClr val="262626"/>
+                </a:solidFill>
+                <a:latin typeface="Manrope"/>
+                <a:ea typeface="Zen Kaku Gothic New"/>
+                <a:cs typeface="Manrope"/>
+              </a:rPr>
+              <a:t>合計20分（3＋10＋5＋2分）。時間配分は例示値</a:t>
+            </a:r>
+          </a:p>
+        </p:txBody>
+      </p:sp>
+      <p:sp>
+        <p:nvSpPr>
+          <p:cNvPr id="38" name="Line 38"/>
           <p:cNvSpPr/>
           <p:nvPr/>
         </p:nvSpPr>
@@ -5042,21 +5276,21 @@
           <a:noFill/>
           <a:ln w="9525">
             <a:solidFill>
-              <a:srgbClr val="151B1D"/>
+              <a:srgbClr val="E7E7E7"/>
             </a:solidFill>
           </a:ln>
         </p:spPr>
       </p:sp>
       <p:sp>
         <p:nvSpPr>
-          <p:cNvPr id="32" name="TextBox 32"/>
+          <p:cNvPr id="39" name="TextBox 39"/>
           <p:cNvSpPr txBox="1"/>
           <p:nvPr/>
         </p:nvSpPr>
         <p:spPr>
           <a:xfrm>
-            <a:off x="365760" y="6623685"/>
-            <a:ext cx="2862121" cy="243840"/>
+            <a:off x="370522" y="6664166"/>
+            <a:ext cx="3297642" cy="167640"/>
           </a:xfrm>
           <a:prstGeom prst="rect">
             <a:avLst/>
@@ -5074,29 +5308,29 @@
           <a:p>
             <a:pPr algn="l"/>
             <a:r>
-              <a:rPr lang="zh-CN" sz="1200" dirty="0">
+              <a:rPr lang="zh-CN" sz="825" dirty="0">
                 <a:solidFill>
                   <a:srgbClr val="6E6E6E"/>
                 </a:solidFill>
-                <a:latin typeface="Zen Kaku Gothic New"/>
-                <a:ea typeface="Microsoft YaHei"/>
-                <a:cs typeface="Zen Kaku Gothic New"/>
+                <a:latin typeface="Manrope"/>
+                <a:ea typeface="Zen Kaku Gothic New"/>
+                <a:cs typeface="Manrope"/>
               </a:rPr>
-              <a:t>来源：架空企画 / 試行のための提案</a:t>
-            </a:r>
-          </a:p>
-        </p:txBody>
-      </p:sp>
-      <p:sp>
-        <p:nvSpPr>
-          <p:cNvPr id="33" name="TextBox 33"/>
+              <a:t>出典：架空のワークショップ案。時間配分は例示で効果は未測定</a:t>
+            </a:r>
+          </a:p>
+        </p:txBody>
+      </p:sp>
+      <p:sp>
+        <p:nvSpPr>
+          <p:cNvPr id="40" name="TextBox 40"/>
           <p:cNvSpPr txBox="1"/>
           <p:nvPr/>
         </p:nvSpPr>
         <p:spPr>
           <a:xfrm>
-            <a:off x="11322558" y="6623685"/>
-            <a:ext cx="503682" cy="243840"/>
+            <a:off x="11475196" y="6664166"/>
+            <a:ext cx="346281" cy="167640"/>
           </a:xfrm>
           <a:prstGeom prst="rect">
             <a:avLst/>
@@ -5114,12 +5348,12 @@
           <a:p>
             <a:pPr algn="r"/>
             <a:r>
-              <a:rPr lang="zh-CN" sz="1200" dirty="0">
+              <a:rPr lang="zh-CN" sz="825" dirty="0">
                 <a:solidFill>
                   <a:srgbClr val="6E6E6E"/>
                 </a:solidFill>
                 <a:latin typeface="Manrope"/>
-                <a:ea typeface="Microsoft YaHei"/>
+                <a:ea typeface="Zen Kaku Gothic New"/>
                 <a:cs typeface="Manrope"/>
               </a:rPr>
               <a:t>2 / 4</a:t>
@@ -5167,7 +5401,7 @@
             <a:avLst/>
           </a:prstGeom>
           <a:solidFill>
-            <a:srgbClr val="F5DC49"/>
+            <a:srgbClr val="FFFFFF"/>
           </a:solidFill>
           <a:ln>
             <a:noFill/>
@@ -5182,8 +5416,8 @@
         </p:nvSpPr>
         <p:spPr>
           <a:xfrm>
-            <a:off x="365760" y="99060"/>
-            <a:ext cx="499896" cy="243840"/>
+            <a:off x="370522" y="139541"/>
+            <a:ext cx="632569" cy="167640"/>
           </a:xfrm>
           <a:prstGeom prst="rect">
             <a:avLst/>
@@ -5201,15 +5435,15 @@
           <a:p>
             <a:pPr algn="l"/>
             <a:r>
-              <a:rPr lang="zh-CN" sz="1200" dirty="0">
-                <a:solidFill>
-                  <a:srgbClr val="3156C5"/>
-                </a:solidFill>
-                <a:latin typeface="Zen Kaku Gothic New"/>
-                <a:ea typeface="Microsoft YaHei"/>
-                <a:cs typeface="Zen Kaku Gothic New"/>
+              <a:rPr lang="zh-CN" sz="825" dirty="0">
+                <a:solidFill>
+                  <a:srgbClr val="6E6E6E"/>
+                </a:solidFill>
+                <a:latin typeface="Manrope"/>
+                <a:ea typeface="Zen Kaku Gothic New"/>
+                <a:cs typeface="Manrope"/>
               </a:rPr>
-              <a:t>E-04</a:t>
+              <a:t>作業の入口</a:t>
             </a:r>
           </a:p>
         </p:txBody>
@@ -5229,7 +5463,7 @@
             <a:avLst/>
           </a:prstGeom>
           <a:solidFill>
-            <a:srgbClr val="3156C5"/>
+            <a:srgbClr val="336EE8"/>
           </a:solidFill>
           <a:ln>
             <a:noFill/>
@@ -5244,8 +5478,8 @@
         </p:nvSpPr>
         <p:spPr>
           <a:xfrm>
-            <a:off x="9500465" y="99060"/>
-            <a:ext cx="2325775" cy="243840"/>
+            <a:off x="11339107" y="131445"/>
+            <a:ext cx="483323" cy="182880"/>
           </a:xfrm>
           <a:prstGeom prst="rect">
             <a:avLst/>
@@ -5263,15 +5497,15 @@
           <a:p>
             <a:pPr algn="r"/>
             <a:r>
-              <a:rPr lang="zh-CN" sz="1200" b="1" dirty="0">
-                <a:solidFill>
-                  <a:srgbClr val="151B1D"/>
-                </a:solidFill>
-                <a:latin typeface="Zen Kaku Gothic New"/>
-                <a:ea typeface="Microsoft YaHei"/>
-                <a:cs typeface="Zen Kaku Gothic New"/>
+              <a:rPr lang="zh-CN" sz="900" b="1" dirty="0">
+                <a:solidFill>
+                  <a:srgbClr val="262626"/>
+                </a:solidFill>
+                <a:latin typeface="Manrope"/>
+                <a:ea typeface="Zen Kaku Gothic New"/>
+                <a:cs typeface="Manrope"/>
               </a:rPr>
-              <a:t>MORNING / WORKSHOP</a:t>
+              <a:t>朝作業</a:t>
             </a:r>
           </a:p>
         </p:txBody>
@@ -5307,7 +5541,7 @@
           <a:noFill/>
           <a:ln w="9525">
             <a:solidFill>
-              <a:srgbClr val="151B1D"/>
+              <a:srgbClr val="E7E7E7"/>
             </a:solidFill>
           </a:ln>
         </p:spPr>
@@ -5320,8 +5554,8 @@
         </p:nvSpPr>
         <p:spPr>
           <a:xfrm>
-            <a:off x="344805" y="435292"/>
-            <a:ext cx="7000910" cy="579120"/>
+            <a:off x="350520" y="483870"/>
+            <a:ext cx="6393084" cy="487680"/>
           </a:xfrm>
           <a:prstGeom prst="rect">
             <a:avLst/>
@@ -5339,15 +5573,15 @@
           <a:p>
             <a:pPr algn="l"/>
             <a:r>
-              <a:rPr lang="zh-CN" sz="2850" b="1" dirty="0">
-                <a:solidFill>
-                  <a:srgbClr val="151B1D"/>
-                </a:solidFill>
-                <a:latin typeface="Zen Kaku Gothic New"/>
-                <a:ea typeface="Microsoft YaHei"/>
-                <a:cs typeface="Zen Kaku Gothic New"/>
+              <a:rPr lang="zh-CN" sz="2400" b="1" dirty="0">
+                <a:solidFill>
+                  <a:srgbClr val="262626"/>
+                </a:solidFill>
+                <a:latin typeface="Manrope"/>
+                <a:ea typeface="Zen Kaku Gothic New"/>
+                <a:cs typeface="Manrope"/>
               </a:rPr>
-              <a:t>作業を始める前に、入口を用意する。</a:t>
+              <a:t>本案は前日に作業の入口を一つ決めておく</a:t>
             </a:r>
           </a:p>
         </p:txBody>
@@ -5383,43 +5617,500 @@
           <a:noFill/>
           <a:ln w="9525">
             <a:solidFill>
-              <a:srgbClr val="151B1D"/>
+              <a:srgbClr val="E7E7E7"/>
             </a:solidFill>
           </a:ln>
         </p:spPr>
       </p:sp>
-      <p:sp>
-        <p:nvSpPr>
-          <p:cNvPr id="9" name="Rectangle 9"/>
-          <p:cNvSpPr/>
-          <p:nvPr/>
-        </p:nvSpPr>
-        <p:spPr>
-          <a:xfrm>
-            <a:off x="2286000" y="1333500"/>
-            <a:ext cx="7620000" cy="1047750"/>
-          </a:xfrm>
-          <a:prstGeom prst="rect">
-            <a:avLst/>
-          </a:prstGeom>
-          <a:solidFill>
-            <a:srgbClr val="151B1D"/>
-          </a:solidFill>
-          <a:ln>
-            <a:noFill/>
-          </a:ln>
-        </p:spPr>
-      </p:sp>
-      <p:sp>
-        <p:nvSpPr>
-          <p:cNvPr id="10" name="TextBox 10"/>
+      <p:grpSp>
+        <p:nvGrpSpPr>
+          <p:cNvPr id="22" name="Group 22"/>
+          <p:cNvGrpSpPr/>
+          <p:nvPr/>
+        </p:nvGrpSpPr>
+        <p:grpSpPr>
+          <a:xfrm>
+            <a:off x="1400175" y="2476500"/>
+            <a:ext cx="9391650" cy="952500"/>
+            <a:chOff x="1400175" y="2476500"/>
+            <a:chExt cx="9391650" cy="952500"/>
+          </a:xfrm>
+        </p:grpSpPr>
+        <p:sp>
+          <p:nvSpPr>
+            <p:cNvPr id="9" name="Rectangle 9"/>
+            <p:cNvSpPr/>
+            <p:nvPr/>
+          </p:nvSpPr>
+          <p:spPr>
+            <a:xfrm>
+              <a:off x="1400175" y="2476500"/>
+              <a:ext cx="1905000" cy="952500"/>
+            </a:xfrm>
+            <a:prstGeom prst="rect">
+              <a:avLst/>
+            </a:prstGeom>
+            <a:solidFill>
+              <a:srgbClr val="F3F3F3"/>
+            </a:solidFill>
+            <a:ln w="14288">
+              <a:solidFill>
+                <a:srgbClr val="9B9B9B"/>
+              </a:solidFill>
+            </a:ln>
+          </p:spPr>
+        </p:sp>
+        <p:sp>
+          <p:nvSpPr>
+            <p:cNvPr id="10" name="TextBox 10"/>
+            <p:cNvSpPr txBox="1"/>
+            <p:nvPr/>
+          </p:nvSpPr>
+          <p:spPr>
+            <a:xfrm>
+              <a:off x="2132785" y="2689860"/>
+              <a:ext cx="439781" cy="243840"/>
+            </a:xfrm>
+            <a:prstGeom prst="rect">
+              <a:avLst/>
+            </a:prstGeom>
+            <a:noFill/>
+            <a:ln>
+              <a:noFill/>
+            </a:ln>
+          </p:spPr>
+          <p:txBody>
+            <a:bodyPr wrap="none" lIns="0" tIns="0" rIns="0" bIns="0" anchor="t" anchorCtr="0">
+              <a:spAutoFit/>
+            </a:bodyPr>
+            <a:lstStyle/>
+            <a:p>
+              <a:pPr algn="ctr"/>
+              <a:r>
+                <a:rPr lang="zh-CN" sz="1200" b="1" dirty="0">
+                  <a:solidFill>
+                    <a:srgbClr val="262626"/>
+                  </a:solidFill>
+                  <a:latin typeface="Manrope"/>
+                  <a:ea typeface="Zen Kaku Gothic New"/>
+                  <a:cs typeface="Manrope"/>
+                </a:rPr>
+                <a:t>前日</a:t>
+              </a:r>
+            </a:p>
+          </p:txBody>
+        </p:sp>
+        <p:sp>
+          <p:nvSpPr>
+            <p:cNvPr id="11" name="TextBox 11"/>
+            <p:cNvSpPr txBox="1"/>
+            <p:nvPr/>
+          </p:nvSpPr>
+          <p:spPr>
+            <a:xfrm>
+              <a:off x="1455232" y="2959418"/>
+              <a:ext cx="1794885" cy="274320"/>
+            </a:xfrm>
+            <a:prstGeom prst="rect">
+              <a:avLst/>
+            </a:prstGeom>
+            <a:noFill/>
+            <a:ln>
+              <a:noFill/>
+            </a:ln>
+          </p:spPr>
+          <p:txBody>
+            <a:bodyPr wrap="none" lIns="0" tIns="0" rIns="0" bIns="0" anchor="t" anchorCtr="0">
+              <a:spAutoFit/>
+            </a:bodyPr>
+            <a:lstStyle/>
+            <a:p>
+              <a:pPr algn="ctr"/>
+              <a:r>
+                <a:rPr lang="zh-CN" sz="1350" b="1" dirty="0">
+                  <a:solidFill>
+                    <a:srgbClr val="262626"/>
+                  </a:solidFill>
+                  <a:latin typeface="Manrope"/>
+                  <a:ea typeface="Zen Kaku Gothic New"/>
+                  <a:cs typeface="Manrope"/>
+                </a:rPr>
+                <a:t>作業を一つ決めておく</a:t>
+              </a:r>
+            </a:p>
+          </p:txBody>
+        </p:sp>
+        <p:sp>
+          <p:nvSpPr>
+            <p:cNvPr id="12" name="Line 12"/>
+            <p:cNvSpPr/>
+            <p:nvPr/>
+          </p:nvSpPr>
+          <p:spPr>
+            <a:xfrm>
+              <a:off x="3305175" y="2952750"/>
+              <a:ext cx="1724025" cy="9525"/>
+            </a:xfrm>
+            <a:custGeom>
+              <a:avLst/>
+              <a:gdLst/>
+              <a:ahLst/>
+              <a:cxnLst/>
+              <a:rect l="l" t="t" r="r" b="b"/>
+              <a:pathLst>
+                <a:path w="1724025" h="9525">
+                  <a:moveTo>
+                    <a:pt x="0" y="0"/>
+                  </a:moveTo>
+                  <a:lnTo>
+                    <a:pt x="1724025" y="0"/>
+                  </a:lnTo>
+                </a:path>
+              </a:pathLst>
+            </a:custGeom>
+            <a:noFill/>
+            <a:ln w="19050">
+              <a:solidFill>
+                <a:srgbClr val="9B9B9B"/>
+              </a:solidFill>
+            </a:ln>
+          </p:spPr>
+        </p:sp>
+        <p:sp>
+          <p:nvSpPr>
+            <p:cNvPr id="13" name="Polygon 13"/>
+            <p:cNvSpPr/>
+            <p:nvPr/>
+          </p:nvSpPr>
+          <p:spPr>
+            <a:xfrm>
+              <a:off x="5029200" y="2895600"/>
+              <a:ext cx="114300" cy="114300"/>
+            </a:xfrm>
+            <a:custGeom>
+              <a:avLst/>
+              <a:gdLst/>
+              <a:ahLst/>
+              <a:cxnLst/>
+              <a:rect l="l" t="t" r="r" b="b"/>
+              <a:pathLst>
+                <a:path w="114300" h="114300">
+                  <a:moveTo>
+                    <a:pt x="0" y="0"/>
+                  </a:moveTo>
+                  <a:lnTo>
+                    <a:pt x="114300" y="57150"/>
+                  </a:lnTo>
+                  <a:lnTo>
+                    <a:pt x="0" y="114300"/>
+                  </a:lnTo>
+                  <a:close/>
+                </a:path>
+              </a:pathLst>
+            </a:custGeom>
+            <a:solidFill>
+              <a:srgbClr val="262626"/>
+            </a:solidFill>
+            <a:ln>
+              <a:noFill/>
+            </a:ln>
+          </p:spPr>
+        </p:sp>
+        <p:sp>
+          <p:nvSpPr>
+            <p:cNvPr id="14" name="Rectangle 14"/>
+            <p:cNvSpPr/>
+            <p:nvPr/>
+          </p:nvSpPr>
+          <p:spPr>
+            <a:xfrm>
+              <a:off x="5143500" y="2476500"/>
+              <a:ext cx="1905000" cy="952500"/>
+            </a:xfrm>
+            <a:prstGeom prst="rect">
+              <a:avLst/>
+            </a:prstGeom>
+            <a:solidFill>
+              <a:srgbClr val="F3F3F3"/>
+            </a:solidFill>
+            <a:ln w="14288">
+              <a:solidFill>
+                <a:srgbClr val="9B9B9B"/>
+              </a:solidFill>
+            </a:ln>
+          </p:spPr>
+        </p:sp>
+        <p:sp>
+          <p:nvSpPr>
+            <p:cNvPr id="15" name="TextBox 15"/>
+            <p:cNvSpPr txBox="1"/>
+            <p:nvPr/>
+          </p:nvSpPr>
+          <p:spPr>
+            <a:xfrm>
+              <a:off x="5978435" y="2689860"/>
+              <a:ext cx="235130" cy="243840"/>
+            </a:xfrm>
+            <a:prstGeom prst="rect">
+              <a:avLst/>
+            </a:prstGeom>
+            <a:noFill/>
+            <a:ln>
+              <a:noFill/>
+            </a:ln>
+          </p:spPr>
+          <p:txBody>
+            <a:bodyPr wrap="none" lIns="0" tIns="0" rIns="0" bIns="0" anchor="t" anchorCtr="0">
+              <a:spAutoFit/>
+            </a:bodyPr>
+            <a:lstStyle/>
+            <a:p>
+              <a:pPr algn="ctr"/>
+              <a:r>
+                <a:rPr lang="zh-CN" sz="1200" b="1" dirty="0">
+                  <a:solidFill>
+                    <a:srgbClr val="262626"/>
+                  </a:solidFill>
+                  <a:latin typeface="Manrope"/>
+                  <a:ea typeface="Zen Kaku Gothic New"/>
+                  <a:cs typeface="Manrope"/>
+                </a:rPr>
+                <a:t>朝</a:t>
+              </a:r>
+            </a:p>
+          </p:txBody>
+        </p:sp>
+        <p:sp>
+          <p:nvSpPr>
+            <p:cNvPr id="16" name="TextBox 16"/>
+            <p:cNvSpPr txBox="1"/>
+            <p:nvPr/>
+          </p:nvSpPr>
+          <p:spPr>
+            <a:xfrm>
+              <a:off x="5268530" y="2959418"/>
+              <a:ext cx="1654941" cy="274320"/>
+            </a:xfrm>
+            <a:prstGeom prst="rect">
+              <a:avLst/>
+            </a:prstGeom>
+            <a:noFill/>
+            <a:ln>
+              <a:noFill/>
+            </a:ln>
+          </p:spPr>
+          <p:txBody>
+            <a:bodyPr wrap="none" lIns="0" tIns="0" rIns="0" bIns="0" anchor="t" anchorCtr="0">
+              <a:spAutoFit/>
+            </a:bodyPr>
+            <a:lstStyle/>
+            <a:p>
+              <a:pPr algn="ctr"/>
+              <a:r>
+                <a:rPr lang="zh-CN" sz="1350" b="1" dirty="0">
+                  <a:solidFill>
+                    <a:srgbClr val="262626"/>
+                  </a:solidFill>
+                  <a:latin typeface="Manrope"/>
+                  <a:ea typeface="Zen Kaku Gothic New"/>
+                  <a:cs typeface="Manrope"/>
+                </a:rPr>
+                <a:t>決めた作業を進める</a:t>
+              </a:r>
+            </a:p>
+          </p:txBody>
+        </p:sp>
+        <p:sp>
+          <p:nvSpPr>
+            <p:cNvPr id="17" name="Line 17"/>
+            <p:cNvSpPr/>
+            <p:nvPr/>
+          </p:nvSpPr>
+          <p:spPr>
+            <a:xfrm>
+              <a:off x="7048500" y="2952750"/>
+              <a:ext cx="1724025" cy="9525"/>
+            </a:xfrm>
+            <a:custGeom>
+              <a:avLst/>
+              <a:gdLst/>
+              <a:ahLst/>
+              <a:cxnLst/>
+              <a:rect l="l" t="t" r="r" b="b"/>
+              <a:pathLst>
+                <a:path w="1724025" h="9525">
+                  <a:moveTo>
+                    <a:pt x="0" y="0"/>
+                  </a:moveTo>
+                  <a:lnTo>
+                    <a:pt x="1724025" y="0"/>
+                  </a:lnTo>
+                </a:path>
+              </a:pathLst>
+            </a:custGeom>
+            <a:noFill/>
+            <a:ln w="19050">
+              <a:solidFill>
+                <a:srgbClr val="9B9B9B"/>
+              </a:solidFill>
+            </a:ln>
+          </p:spPr>
+        </p:sp>
+        <p:sp>
+          <p:nvSpPr>
+            <p:cNvPr id="18" name="Polygon 18"/>
+            <p:cNvSpPr/>
+            <p:nvPr/>
+          </p:nvSpPr>
+          <p:spPr>
+            <a:xfrm>
+              <a:off x="8772525" y="2895600"/>
+              <a:ext cx="114300" cy="114300"/>
+            </a:xfrm>
+            <a:custGeom>
+              <a:avLst/>
+              <a:gdLst/>
+              <a:ahLst/>
+              <a:cxnLst/>
+              <a:rect l="l" t="t" r="r" b="b"/>
+              <a:pathLst>
+                <a:path w="114300" h="114300">
+                  <a:moveTo>
+                    <a:pt x="0" y="0"/>
+                  </a:moveTo>
+                  <a:lnTo>
+                    <a:pt x="114300" y="57150"/>
+                  </a:lnTo>
+                  <a:lnTo>
+                    <a:pt x="0" y="114300"/>
+                  </a:lnTo>
+                  <a:close/>
+                </a:path>
+              </a:pathLst>
+            </a:custGeom>
+            <a:solidFill>
+              <a:srgbClr val="262626"/>
+            </a:solidFill>
+            <a:ln>
+              <a:noFill/>
+            </a:ln>
+          </p:spPr>
+        </p:sp>
+        <p:sp>
+          <p:nvSpPr>
+            <p:cNvPr id="19" name="Rectangle 19"/>
+            <p:cNvSpPr/>
+            <p:nvPr/>
+          </p:nvSpPr>
+          <p:spPr>
+            <a:xfrm>
+              <a:off x="8886825" y="2476500"/>
+              <a:ext cx="1905000" cy="952500"/>
+            </a:xfrm>
+            <a:prstGeom prst="rect">
+              <a:avLst/>
+            </a:prstGeom>
+            <a:solidFill>
+              <a:srgbClr val="F3F3F3"/>
+            </a:solidFill>
+            <a:ln w="14288">
+              <a:solidFill>
+                <a:srgbClr val="9B9B9B"/>
+              </a:solidFill>
+            </a:ln>
+          </p:spPr>
+        </p:sp>
+        <p:sp>
+          <p:nvSpPr>
+            <p:cNvPr id="20" name="TextBox 20"/>
+            <p:cNvSpPr txBox="1"/>
+            <p:nvPr/>
+          </p:nvSpPr>
+          <p:spPr>
+            <a:xfrm>
+              <a:off x="9517109" y="2689860"/>
+              <a:ext cx="644431" cy="243840"/>
+            </a:xfrm>
+            <a:prstGeom prst="rect">
+              <a:avLst/>
+            </a:prstGeom>
+            <a:noFill/>
+            <a:ln>
+              <a:noFill/>
+            </a:ln>
+          </p:spPr>
+          <p:txBody>
+            <a:bodyPr wrap="none" lIns="0" tIns="0" rIns="0" bIns="0" anchor="t" anchorCtr="0">
+              <a:spAutoFit/>
+            </a:bodyPr>
+            <a:lstStyle/>
+            <a:p>
+              <a:pPr algn="ctr"/>
+              <a:r>
+                <a:rPr lang="zh-CN" sz="1200" b="1" dirty="0">
+                  <a:solidFill>
+                    <a:srgbClr val="262626"/>
+                  </a:solidFill>
+                  <a:latin typeface="Manrope"/>
+                  <a:ea typeface="Zen Kaku Gothic New"/>
+                  <a:cs typeface="Manrope"/>
+                </a:rPr>
+                <a:t>終了時</a:t>
+              </a:r>
+            </a:p>
+          </p:txBody>
+        </p:sp>
+        <p:sp>
+          <p:nvSpPr>
+            <p:cNvPr id="21" name="TextBox 21"/>
+            <p:cNvSpPr txBox="1"/>
+            <p:nvPr/>
+          </p:nvSpPr>
+          <p:spPr>
+            <a:xfrm>
+              <a:off x="9151799" y="2959418"/>
+              <a:ext cx="1375051" cy="274320"/>
+            </a:xfrm>
+            <a:prstGeom prst="rect">
+              <a:avLst/>
+            </a:prstGeom>
+            <a:noFill/>
+            <a:ln>
+              <a:noFill/>
+            </a:ln>
+          </p:spPr>
+          <p:txBody>
+            <a:bodyPr wrap="none" lIns="0" tIns="0" rIns="0" bIns="0" anchor="t" anchorCtr="0">
+              <a:spAutoFit/>
+            </a:bodyPr>
+            <a:lstStyle/>
+            <a:p>
+              <a:pPr algn="ctr"/>
+              <a:r>
+                <a:rPr lang="zh-CN" sz="1350" b="1" dirty="0">
+                  <a:solidFill>
+                    <a:srgbClr val="262626"/>
+                  </a:solidFill>
+                  <a:latin typeface="Manrope"/>
+                  <a:ea typeface="Zen Kaku Gothic New"/>
+                  <a:cs typeface="Manrope"/>
+                </a:rPr>
+                <a:t>続きを一言残す</a:t>
+              </a:r>
+            </a:p>
+          </p:txBody>
+        </p:sp>
+      </p:grpSp>
+      <p:sp>
+        <p:nvSpPr>
+          <p:cNvPr id="23" name="TextBox 23"/>
           <p:cNvSpPr txBox="1"/>
           <p:nvPr/>
         </p:nvSpPr>
         <p:spPr>
           <a:xfrm>
-            <a:off x="5887694" y="1565910"/>
-            <a:ext cx="416613" cy="243840"/>
+            <a:off x="1552150" y="3910489"/>
+            <a:ext cx="1601050" cy="259080"/>
           </a:xfrm>
           <a:prstGeom prst="rect">
             <a:avLst/>
@@ -5437,29 +6128,29 @@
           <a:p>
             <a:pPr algn="ctr"/>
             <a:r>
-              <a:rPr lang="zh-CN" sz="1200" dirty="0">
-                <a:solidFill>
-                  <a:srgbClr val="F3F0E3"/>
-                </a:solidFill>
-                <a:latin typeface="Zen Kaku Gothic New"/>
-                <a:ea typeface="Microsoft YaHei"/>
-                <a:cs typeface="Zen Kaku Gothic New"/>
+              <a:rPr lang="zh-CN" sz="1275" dirty="0">
+                <a:solidFill>
+                  <a:srgbClr val="262626"/>
+                </a:solidFill>
+                <a:latin typeface="Manrope"/>
+                <a:ea typeface="Zen Kaku Gothic New"/>
+                <a:cs typeface="Manrope"/>
               </a:rPr>
-              <a:t>前日</a:t>
-            </a:r>
-          </a:p>
-        </p:txBody>
-      </p:sp>
-      <p:sp>
-        <p:nvSpPr>
-          <p:cNvPr id="11" name="TextBox 11"/>
+              <a:t>必要な資料をそろえる</a:t>
+            </a:r>
+          </a:p>
+        </p:txBody>
+      </p:sp>
+      <p:sp>
+        <p:nvSpPr>
+          <p:cNvPr id="24" name="TextBox 24"/>
           <p:cNvSpPr txBox="1"/>
           <p:nvPr/>
         </p:nvSpPr>
         <p:spPr>
           <a:xfrm>
-            <a:off x="4546688" y="1841182"/>
-            <a:ext cx="3098625" cy="335280"/>
+            <a:off x="1592372" y="4196239"/>
+            <a:ext cx="1520605" cy="259080"/>
           </a:xfrm>
           <a:prstGeom prst="rect">
             <a:avLst/>
@@ -5477,127 +6168,29 @@
           <a:p>
             <a:pPr algn="ctr"/>
             <a:r>
-              <a:rPr lang="zh-CN" sz="1650" b="1" dirty="0">
-                <a:solidFill>
-                  <a:srgbClr val="F5DC49"/>
-                </a:solidFill>
-                <a:latin typeface="Zen Kaku Gothic New"/>
-                <a:ea typeface="Microsoft YaHei"/>
-                <a:cs typeface="Zen Kaku Gothic New"/>
+              <a:rPr lang="zh-CN" sz="1275" dirty="0">
+                <a:solidFill>
+                  <a:srgbClr val="262626"/>
+                </a:solidFill>
+                <a:latin typeface="Manrope"/>
+                <a:ea typeface="Zen Kaku Gothic New"/>
+                <a:cs typeface="Manrope"/>
               </a:rPr>
-              <a:t>手をつける場所を、一つ決める</a:t>
-            </a:r>
-          </a:p>
-        </p:txBody>
-      </p:sp>
-      <p:sp>
-        <p:nvSpPr>
-          <p:cNvPr id="12" name="Line 12"/>
-          <p:cNvSpPr/>
-          <p:nvPr/>
-        </p:nvSpPr>
-        <p:spPr>
-          <a:xfrm>
-            <a:off x="6096000" y="2381250"/>
-            <a:ext cx="9525" cy="428625"/>
-          </a:xfrm>
-          <a:custGeom>
-            <a:avLst/>
-            <a:gdLst/>
-            <a:ahLst/>
-            <a:cxnLst/>
-            <a:rect l="l" t="t" r="r" b="b"/>
-            <a:pathLst>
-              <a:path w="9525" h="428625">
-                <a:moveTo>
-                  <a:pt x="0" y="0"/>
-                </a:moveTo>
-                <a:lnTo>
-                  <a:pt x="0" y="428625"/>
-                </a:lnTo>
-              </a:path>
-            </a:pathLst>
-          </a:custGeom>
-          <a:noFill/>
-          <a:ln w="19050">
-            <a:solidFill>
-              <a:srgbClr val="9B9B9B"/>
-            </a:solidFill>
-          </a:ln>
-        </p:spPr>
-      </p:sp>
-      <p:sp>
-        <p:nvSpPr>
-          <p:cNvPr id="13" name="Polygon 13"/>
-          <p:cNvSpPr/>
-          <p:nvPr/>
-        </p:nvSpPr>
-        <p:spPr>
-          <a:xfrm>
-            <a:off x="6038850" y="2809875"/>
-            <a:ext cx="114300" cy="114300"/>
-          </a:xfrm>
-          <a:custGeom>
-            <a:avLst/>
-            <a:gdLst/>
-            <a:ahLst/>
-            <a:cxnLst/>
-            <a:rect l="l" t="t" r="r" b="b"/>
-            <a:pathLst>
-              <a:path w="114300" h="114300">
-                <a:moveTo>
-                  <a:pt x="0" y="0"/>
-                </a:moveTo>
-                <a:lnTo>
-                  <a:pt x="57150" y="114300"/>
-                </a:lnTo>
-                <a:lnTo>
-                  <a:pt x="114300" y="0"/>
-                </a:lnTo>
-                <a:close/>
-              </a:path>
-            </a:pathLst>
-          </a:custGeom>
-          <a:solidFill>
-            <a:srgbClr val="151B1D"/>
-          </a:solidFill>
-          <a:ln>
-            <a:noFill/>
-          </a:ln>
-        </p:spPr>
-      </p:sp>
-      <p:sp>
-        <p:nvSpPr>
-          <p:cNvPr id="14" name="Rectangle 14"/>
-          <p:cNvSpPr/>
-          <p:nvPr/>
-        </p:nvSpPr>
-        <p:spPr>
-          <a:xfrm>
-            <a:off x="2286000" y="2924175"/>
-            <a:ext cx="7620000" cy="1047750"/>
-          </a:xfrm>
-          <a:prstGeom prst="rect">
-            <a:avLst/>
-          </a:prstGeom>
-          <a:solidFill>
-            <a:srgbClr val="3156C5"/>
-          </a:solidFill>
-          <a:ln>
-            <a:noFill/>
-          </a:ln>
-        </p:spPr>
-      </p:sp>
-      <p:sp>
-        <p:nvSpPr>
-          <p:cNvPr id="15" name="TextBox 15"/>
+              <a:t>始める位置をメモする</a:t>
+            </a:r>
+          </a:p>
+        </p:txBody>
+      </p:sp>
+      <p:sp>
+        <p:nvSpPr>
+          <p:cNvPr id="25" name="TextBox 25"/>
           <p:cNvSpPr txBox="1"/>
           <p:nvPr/>
         </p:nvSpPr>
         <p:spPr>
           <a:xfrm>
-            <a:off x="5984227" y="3156585"/>
-            <a:ext cx="223546" cy="243840"/>
+            <a:off x="5295475" y="3910489"/>
+            <a:ext cx="1601050" cy="259080"/>
           </a:xfrm>
           <a:prstGeom prst="rect">
             <a:avLst/>
@@ -5615,29 +6208,29 @@
           <a:p>
             <a:pPr algn="ctr"/>
             <a:r>
-              <a:rPr lang="zh-CN" sz="1200" dirty="0">
-                <a:solidFill>
-                  <a:srgbClr val="F3F0E3"/>
-                </a:solidFill>
-                <a:latin typeface="Zen Kaku Gothic New"/>
-                <a:ea typeface="Microsoft YaHei"/>
-                <a:cs typeface="Zen Kaku Gothic New"/>
+              <a:rPr lang="zh-CN" sz="1275" dirty="0">
+                <a:solidFill>
+                  <a:srgbClr val="262626"/>
+                </a:solidFill>
+                <a:latin typeface="Manrope"/>
+                <a:ea typeface="Zen Kaku Gothic New"/>
+                <a:cs typeface="Manrope"/>
               </a:rPr>
-              <a:t>朝</a:t>
-            </a:r>
-          </a:p>
-        </p:txBody>
-      </p:sp>
-      <p:sp>
-        <p:nvSpPr>
-          <p:cNvPr id="16" name="TextBox 16"/>
+              <a:t>決めた作業だけ始める</a:t>
+            </a:r>
+          </a:p>
+        </p:txBody>
+      </p:sp>
+      <p:sp>
+        <p:nvSpPr>
+          <p:cNvPr id="26" name="TextBox 26"/>
           <p:cNvSpPr txBox="1"/>
           <p:nvPr/>
         </p:nvSpPr>
         <p:spPr>
           <a:xfrm>
-            <a:off x="4883257" y="3431858"/>
-            <a:ext cx="2425485" cy="335280"/>
+            <a:off x="5277375" y="4196239"/>
+            <a:ext cx="1637250" cy="259080"/>
           </a:xfrm>
           <a:prstGeom prst="rect">
             <a:avLst/>
@@ -5655,127 +6248,29 @@
           <a:p>
             <a:pPr algn="ctr"/>
             <a:r>
-              <a:rPr lang="zh-CN" sz="1650" b="1" dirty="0">
-                <a:solidFill>
-                  <a:srgbClr val="F5DC49"/>
-                </a:solidFill>
-                <a:latin typeface="Zen Kaku Gothic New"/>
-                <a:ea typeface="Microsoft YaHei"/>
-                <a:cs typeface="Zen Kaku Gothic New"/>
+              <a:rPr lang="zh-CN" sz="1275" dirty="0">
+                <a:solidFill>
+                  <a:srgbClr val="262626"/>
+                </a:solidFill>
+                <a:latin typeface="Manrope"/>
+                <a:ea typeface="Zen Kaku Gothic New"/>
+                <a:cs typeface="Manrope"/>
               </a:rPr>
-              <a:t>その一つから、始めてみる</a:t>
-            </a:r>
-          </a:p>
-        </p:txBody>
-      </p:sp>
-      <p:sp>
-        <p:nvSpPr>
-          <p:cNvPr id="17" name="Line 17"/>
-          <p:cNvSpPr/>
-          <p:nvPr/>
-        </p:nvSpPr>
-        <p:spPr>
-          <a:xfrm>
-            <a:off x="6096000" y="3971925"/>
-            <a:ext cx="9525" cy="428625"/>
-          </a:xfrm>
-          <a:custGeom>
-            <a:avLst/>
-            <a:gdLst/>
-            <a:ahLst/>
-            <a:cxnLst/>
-            <a:rect l="l" t="t" r="r" b="b"/>
-            <a:pathLst>
-              <a:path w="9525" h="428625">
-                <a:moveTo>
-                  <a:pt x="0" y="0"/>
-                </a:moveTo>
-                <a:lnTo>
-                  <a:pt x="0" y="428625"/>
-                </a:lnTo>
-              </a:path>
-            </a:pathLst>
-          </a:custGeom>
-          <a:noFill/>
-          <a:ln w="19050">
-            <a:solidFill>
-              <a:srgbClr val="9B9B9B"/>
-            </a:solidFill>
-          </a:ln>
-        </p:spPr>
-      </p:sp>
-      <p:sp>
-        <p:nvSpPr>
-          <p:cNvPr id="18" name="Polygon 18"/>
-          <p:cNvSpPr/>
-          <p:nvPr/>
-        </p:nvSpPr>
-        <p:spPr>
-          <a:xfrm>
-            <a:off x="6038850" y="4400550"/>
-            <a:ext cx="114300" cy="114300"/>
-          </a:xfrm>
-          <a:custGeom>
-            <a:avLst/>
-            <a:gdLst/>
-            <a:ahLst/>
-            <a:cxnLst/>
-            <a:rect l="l" t="t" r="r" b="b"/>
-            <a:pathLst>
-              <a:path w="114300" h="114300">
-                <a:moveTo>
-                  <a:pt x="0" y="0"/>
-                </a:moveTo>
-                <a:lnTo>
-                  <a:pt x="57150" y="114300"/>
-                </a:lnTo>
-                <a:lnTo>
-                  <a:pt x="114300" y="0"/>
-                </a:lnTo>
-                <a:close/>
-              </a:path>
-            </a:pathLst>
-          </a:custGeom>
-          <a:solidFill>
-            <a:srgbClr val="9B9B9B"/>
-          </a:solidFill>
-          <a:ln>
-            <a:noFill/>
-          </a:ln>
-        </p:spPr>
-      </p:sp>
-      <p:sp>
-        <p:nvSpPr>
-          <p:cNvPr id="19" name="Rectangle 19"/>
-          <p:cNvSpPr/>
-          <p:nvPr/>
-        </p:nvSpPr>
-        <p:spPr>
-          <a:xfrm>
-            <a:off x="2286000" y="4514850"/>
-            <a:ext cx="7620000" cy="1047750"/>
-          </a:xfrm>
-          <a:prstGeom prst="rect">
-            <a:avLst/>
-          </a:prstGeom>
-          <a:solidFill>
-            <a:srgbClr val="F1EACF"/>
-          </a:solidFill>
-          <a:ln>
-            <a:noFill/>
-          </a:ln>
-        </p:spPr>
-      </p:sp>
-      <p:sp>
-        <p:nvSpPr>
-          <p:cNvPr id="20" name="TextBox 20"/>
+              <a:t>時間配分の案を試す</a:t>
+            </a:r>
+          </a:p>
+        </p:txBody>
+      </p:sp>
+      <p:sp>
+        <p:nvSpPr>
+          <p:cNvPr id="27" name="TextBox 27"/>
           <p:cNvSpPr txBox="1"/>
           <p:nvPr/>
         </p:nvSpPr>
         <p:spPr>
           <a:xfrm>
-            <a:off x="5887694" y="4747260"/>
-            <a:ext cx="416613" cy="243840"/>
+            <a:off x="9060922" y="3910489"/>
+            <a:ext cx="1556805" cy="259080"/>
           </a:xfrm>
           <a:prstGeom prst="rect">
             <a:avLst/>
@@ -5793,29 +6288,29 @@
           <a:p>
             <a:pPr algn="ctr"/>
             <a:r>
-              <a:rPr lang="zh-CN" sz="1200" dirty="0">
-                <a:solidFill>
-                  <a:srgbClr val="3156C5"/>
-                </a:solidFill>
-                <a:latin typeface="Zen Kaku Gothic New"/>
-                <a:ea typeface="Microsoft YaHei"/>
-                <a:cs typeface="Zen Kaku Gothic New"/>
+              <a:rPr lang="zh-CN" sz="1275" dirty="0">
+                <a:solidFill>
+                  <a:srgbClr val="262626"/>
+                </a:solidFill>
+                <a:latin typeface="Manrope"/>
+                <a:ea typeface="Zen Kaku Gothic New"/>
+                <a:cs typeface="Manrope"/>
               </a:rPr>
-              <a:t>最後</a:t>
-            </a:r>
-          </a:p>
-        </p:txBody>
-      </p:sp>
-      <p:sp>
-        <p:nvSpPr>
-          <p:cNvPr id="21" name="TextBox 21"/>
+              <a:t>途中でも記録を残す</a:t>
+            </a:r>
+          </a:p>
+        </p:txBody>
+      </p:sp>
+      <p:sp>
+        <p:nvSpPr>
+          <p:cNvPr id="28" name="TextBox 28"/>
           <p:cNvSpPr txBox="1"/>
           <p:nvPr/>
         </p:nvSpPr>
         <p:spPr>
           <a:xfrm>
-            <a:off x="4772907" y="5022532"/>
-            <a:ext cx="2646187" cy="335280"/>
+            <a:off x="9020700" y="4196239"/>
+            <a:ext cx="1637250" cy="259080"/>
           </a:xfrm>
           <a:prstGeom prst="rect">
             <a:avLst/>
@@ -5833,22 +6328,22 @@
           <a:p>
             <a:pPr algn="ctr"/>
             <a:r>
-              <a:rPr lang="zh-CN" sz="1650" b="1" dirty="0">
-                <a:solidFill>
-                  <a:srgbClr val="151B1D"/>
-                </a:solidFill>
-                <a:latin typeface="Zen Kaku Gothic New"/>
-                <a:ea typeface="Microsoft YaHei"/>
-                <a:cs typeface="Zen Kaku Gothic New"/>
+              <a:rPr lang="zh-CN" sz="1275" dirty="0">
+                <a:solidFill>
+                  <a:srgbClr val="262626"/>
+                </a:solidFill>
+                <a:latin typeface="Manrope"/>
+                <a:ea typeface="Zen Kaku Gothic New"/>
+                <a:cs typeface="Manrope"/>
               </a:rPr>
-              <a:t>続きがわかる一言を、残す</a:t>
-            </a:r>
-          </a:p>
-        </p:txBody>
-      </p:sp>
-      <p:sp>
-        <p:nvSpPr>
-          <p:cNvPr id="22" name="Line 22"/>
+              <a:t>次の開始位置を書く</a:t>
+            </a:r>
+          </a:p>
+        </p:txBody>
+      </p:sp>
+      <p:sp>
+        <p:nvSpPr>
+          <p:cNvPr id="29" name="Line 29"/>
           <p:cNvSpPr/>
           <p:nvPr/>
         </p:nvSpPr>
@@ -5877,21 +6372,21 @@
           <a:noFill/>
           <a:ln w="9525">
             <a:solidFill>
-              <a:srgbClr val="151B1D"/>
+              <a:srgbClr val="E7E7E7"/>
             </a:solidFill>
           </a:ln>
         </p:spPr>
       </p:sp>
       <p:sp>
         <p:nvSpPr>
-          <p:cNvPr id="23" name="TextBox 23"/>
+          <p:cNvPr id="30" name="TextBox 30"/>
           <p:cNvSpPr txBox="1"/>
           <p:nvPr/>
         </p:nvSpPr>
         <p:spPr>
           <a:xfrm>
-            <a:off x="365760" y="6623685"/>
-            <a:ext cx="2862121" cy="243840"/>
+            <a:off x="370522" y="6664166"/>
+            <a:ext cx="3297642" cy="167640"/>
           </a:xfrm>
           <a:prstGeom prst="rect">
             <a:avLst/>
@@ -5909,29 +6404,29 @@
           <a:p>
             <a:pPr algn="l"/>
             <a:r>
-              <a:rPr lang="zh-CN" sz="1200" dirty="0">
-                <a:solidFill>
-                  <a:srgbClr val="3156C5"/>
-                </a:solidFill>
-                <a:latin typeface="Zen Kaku Gothic New"/>
-                <a:ea typeface="Microsoft YaHei"/>
-                <a:cs typeface="Zen Kaku Gothic New"/>
+              <a:rPr lang="zh-CN" sz="825" dirty="0">
+                <a:solidFill>
+                  <a:srgbClr val="6E6E6E"/>
+                </a:solidFill>
+                <a:latin typeface="Manrope"/>
+                <a:ea typeface="Zen Kaku Gothic New"/>
+                <a:cs typeface="Manrope"/>
               </a:rPr>
-              <a:t>来源：架空企画 / 試行のための提案</a:t>
-            </a:r>
-          </a:p>
-        </p:txBody>
-      </p:sp>
-      <p:sp>
-        <p:nvSpPr>
-          <p:cNvPr id="24" name="TextBox 24"/>
+              <a:t>出典：架空のワークショップ案。時間配分は例示で効果は未測定</a:t>
+            </a:r>
+          </a:p>
+        </p:txBody>
+      </p:sp>
+      <p:sp>
+        <p:nvSpPr>
+          <p:cNvPr id="31" name="TextBox 31"/>
           <p:cNvSpPr txBox="1"/>
           <p:nvPr/>
         </p:nvSpPr>
         <p:spPr>
           <a:xfrm>
-            <a:off x="11322558" y="6623685"/>
-            <a:ext cx="503682" cy="243840"/>
+            <a:off x="11475196" y="6664166"/>
+            <a:ext cx="346281" cy="167640"/>
           </a:xfrm>
           <a:prstGeom prst="rect">
             <a:avLst/>
@@ -5949,12 +6444,12 @@
           <a:p>
             <a:pPr algn="r"/>
             <a:r>
-              <a:rPr lang="zh-CN" sz="1200" dirty="0">
-                <a:solidFill>
-                  <a:srgbClr val="3156C5"/>
+              <a:rPr lang="zh-CN" sz="825" dirty="0">
+                <a:solidFill>
+                  <a:srgbClr val="6E6E6E"/>
                 </a:solidFill>
                 <a:latin typeface="Manrope"/>
-                <a:ea typeface="Microsoft YaHei"/>
+                <a:ea typeface="Zen Kaku Gothic New"/>
                 <a:cs typeface="Manrope"/>
               </a:rPr>
               <a:t>3 / 4</a:t>
@@ -6002,7 +6497,7 @@
             <a:avLst/>
           </a:prstGeom>
           <a:solidFill>
-            <a:srgbClr val="1A2546"/>
+            <a:srgbClr val="FFFFFF"/>
           </a:solidFill>
           <a:ln>
             <a:noFill/>
@@ -6017,8 +6512,8 @@
         </p:nvSpPr>
         <p:spPr>
           <a:xfrm>
-            <a:off x="365760" y="99060"/>
-            <a:ext cx="499896" cy="243840"/>
+            <a:off x="370522" y="139541"/>
+            <a:ext cx="1030768" cy="167640"/>
           </a:xfrm>
           <a:prstGeom prst="rect">
             <a:avLst/>
@@ -6036,15 +6531,15 @@
           <a:p>
             <a:pPr algn="l"/>
             <a:r>
-              <a:rPr lang="zh-CN" sz="1200" dirty="0">
-                <a:solidFill>
-                  <a:srgbClr val="F3F0E3"/>
-                </a:solidFill>
-                <a:latin typeface="Zen Kaku Gothic New"/>
-                <a:ea typeface="Microsoft YaHei"/>
-                <a:cs typeface="Zen Kaku Gothic New"/>
+              <a:rPr lang="zh-CN" sz="825" dirty="0">
+                <a:solidFill>
+                  <a:srgbClr val="6E6E6E"/>
+                </a:solidFill>
+                <a:latin typeface="Manrope"/>
+                <a:ea typeface="Zen Kaku Gothic New"/>
+                <a:cs typeface="Manrope"/>
               </a:rPr>
-              <a:t>A-90</a:t>
+              <a:t>四週間の試行計画</a:t>
             </a:r>
           </a:p>
         </p:txBody>
@@ -6064,7 +6559,7 @@
             <a:avLst/>
           </a:prstGeom>
           <a:solidFill>
-            <a:srgbClr val="3156C5"/>
+            <a:srgbClr val="336EE8"/>
           </a:solidFill>
           <a:ln>
             <a:noFill/>
@@ -6079,8 +6574,8 @@
         </p:nvSpPr>
         <p:spPr>
           <a:xfrm>
-            <a:off x="9500465" y="99060"/>
-            <a:ext cx="2325775" cy="243840"/>
+            <a:off x="11339107" y="131445"/>
+            <a:ext cx="483323" cy="182880"/>
           </a:xfrm>
           <a:prstGeom prst="rect">
             <a:avLst/>
@@ -6098,15 +6593,15 @@
           <a:p>
             <a:pPr algn="r"/>
             <a:r>
-              <a:rPr lang="zh-CN" sz="1200" b="1" dirty="0">
-                <a:solidFill>
-                  <a:srgbClr val="F3F0E3"/>
-                </a:solidFill>
-                <a:latin typeface="Zen Kaku Gothic New"/>
-                <a:ea typeface="Microsoft YaHei"/>
-                <a:cs typeface="Zen Kaku Gothic New"/>
+              <a:rPr lang="zh-CN" sz="900" b="1" dirty="0">
+                <a:solidFill>
+                  <a:srgbClr val="262626"/>
+                </a:solidFill>
+                <a:latin typeface="Manrope"/>
+                <a:ea typeface="Zen Kaku Gothic New"/>
+                <a:cs typeface="Manrope"/>
               </a:rPr>
-              <a:t>MORNING / WORKSHOP</a:t>
+              <a:t>朝作業</a:t>
             </a:r>
           </a:p>
         </p:txBody>
@@ -6142,7 +6637,7 @@
           <a:noFill/>
           <a:ln w="9525">
             <a:solidFill>
-              <a:srgbClr val="A8B4D5"/>
+              <a:srgbClr val="E7E7E7"/>
             </a:solidFill>
           </a:ln>
         </p:spPr>
@@ -6155,8 +6650,8 @@
         </p:nvSpPr>
         <p:spPr>
           <a:xfrm>
-            <a:off x="344805" y="435292"/>
-            <a:ext cx="5733381" cy="579120"/>
+            <a:off x="350520" y="483870"/>
+            <a:ext cx="7709267" cy="487680"/>
           </a:xfrm>
           <a:prstGeom prst="rect">
             <a:avLst/>
@@ -6174,15 +6669,15 @@
           <a:p>
             <a:pPr algn="l"/>
             <a:r>
-              <a:rPr lang="zh-CN" sz="2850" b="1" dirty="0">
-                <a:solidFill>
-                  <a:srgbClr val="F3F0E3"/>
-                </a:solidFill>
-                <a:latin typeface="Zen Kaku Gothic New"/>
-                <a:ea typeface="Microsoft YaHei"/>
-                <a:cs typeface="Zen Kaku Gothic New"/>
+              <a:rPr lang="zh-CN" sz="2400" b="1" dirty="0">
+                <a:solidFill>
+                  <a:srgbClr val="262626"/>
+                </a:solidFill>
+                <a:latin typeface="Manrope"/>
+                <a:ea typeface="Zen Kaku Gothic New"/>
+                <a:cs typeface="Manrope"/>
               </a:rPr>
-              <a:t>四週間で、続け方を確かめる。</a:t>
+              <a:t>試行計画は取り組み・記録・相談を週ごとに並べる</a:t>
             </a:r>
           </a:p>
         </p:txBody>
@@ -6218,7 +6713,7 @@
           <a:noFill/>
           <a:ln w="9525">
             <a:solidFill>
-              <a:srgbClr val="A8B4D5"/>
+              <a:srgbClr val="E7E7E7"/>
             </a:solidFill>
           </a:ln>
         </p:spPr>
@@ -6231,8 +6726,8 @@
         </p:nvSpPr>
         <p:spPr>
           <a:xfrm>
-            <a:off x="1600200" y="2133600"/>
-            <a:ext cx="9525" cy="3390900"/>
+            <a:off x="1600200" y="1657350"/>
+            <a:ext cx="9525" cy="3619500"/>
           </a:xfrm>
           <a:custGeom>
             <a:avLst/>
@@ -6241,12 +6736,12 @@
             <a:cxnLst/>
             <a:rect l="l" t="t" r="r" b="b"/>
             <a:pathLst>
-              <a:path w="9525" h="3390900">
+              <a:path w="9525" h="3619500">
                 <a:moveTo>
                   <a:pt x="0" y="0"/>
                 </a:moveTo>
                 <a:lnTo>
-                  <a:pt x="0" y="3390900"/>
+                  <a:pt x="0" y="3619500"/>
                 </a:lnTo>
               </a:path>
             </a:pathLst>
@@ -6254,7 +6749,7 @@
           <a:noFill/>
           <a:ln w="7620">
             <a:solidFill>
-              <a:srgbClr val="A8B4D5"/>
+              <a:srgbClr val="E7E7E7"/>
             </a:solidFill>
             <a:custDash>
               <a:ds d="250000" sp="375000"/>
@@ -6270,7 +6765,7 @@
         </p:nvSpPr>
         <p:spPr>
           <a:xfrm>
-            <a:off x="1429750" y="1794510"/>
+            <a:off x="1429750" y="1318260"/>
             <a:ext cx="340901" cy="243840"/>
           </a:xfrm>
           <a:prstGeom prst="rect">
@@ -6291,10 +6786,10 @@
             <a:r>
               <a:rPr lang="zh-CN" sz="1200" dirty="0">
                 <a:solidFill>
-                  <a:srgbClr val="F5DC49"/>
+                  <a:srgbClr val="262626"/>
                 </a:solidFill>
                 <a:latin typeface="Manrope"/>
-                <a:ea typeface="Microsoft YaHei"/>
+                <a:ea typeface="Zen Kaku Gothic New"/>
                 <a:cs typeface="Manrope"/>
               </a:rPr>
               <a:t>0週</a:t>
@@ -6310,8 +6805,8 @@
         </p:nvSpPr>
         <p:spPr>
           <a:xfrm>
-            <a:off x="4152900" y="2133600"/>
-            <a:ext cx="9525" cy="3390900"/>
+            <a:off x="4105275" y="1657350"/>
+            <a:ext cx="9525" cy="3619500"/>
           </a:xfrm>
           <a:custGeom>
             <a:avLst/>
@@ -6320,12 +6815,12 @@
             <a:cxnLst/>
             <a:rect l="l" t="t" r="r" b="b"/>
             <a:pathLst>
-              <a:path w="9525" h="3390900">
+              <a:path w="9525" h="3619500">
                 <a:moveTo>
                   <a:pt x="0" y="0"/>
                 </a:moveTo>
                 <a:lnTo>
-                  <a:pt x="0" y="3390900"/>
+                  <a:pt x="0" y="3619500"/>
                 </a:lnTo>
               </a:path>
             </a:pathLst>
@@ -6333,7 +6828,7 @@
           <a:noFill/>
           <a:ln w="7620">
             <a:solidFill>
-              <a:srgbClr val="A8B4D5"/>
+              <a:srgbClr val="E7E7E7"/>
             </a:solidFill>
             <a:custDash>
               <a:ds d="250000" sp="375000"/>
@@ -6349,7 +6844,7 @@
         </p:nvSpPr>
         <p:spPr>
           <a:xfrm>
-            <a:off x="3993807" y="1794510"/>
+            <a:off x="3946182" y="1318260"/>
             <a:ext cx="318187" cy="243840"/>
           </a:xfrm>
           <a:prstGeom prst="rect">
@@ -6370,10 +6865,10 @@
             <a:r>
               <a:rPr lang="zh-CN" sz="1200" dirty="0">
                 <a:solidFill>
-                  <a:srgbClr val="F5DC49"/>
+                  <a:srgbClr val="262626"/>
                 </a:solidFill>
                 <a:latin typeface="Manrope"/>
-                <a:ea typeface="Microsoft YaHei"/>
+                <a:ea typeface="Zen Kaku Gothic New"/>
                 <a:cs typeface="Manrope"/>
               </a:rPr>
               <a:t>1週</a:t>
@@ -6389,8 +6884,8 @@
         </p:nvSpPr>
         <p:spPr>
           <a:xfrm>
-            <a:off x="6705600" y="2133600"/>
-            <a:ext cx="9525" cy="3390900"/>
+            <a:off x="6610350" y="1657350"/>
+            <a:ext cx="9525" cy="3619500"/>
           </a:xfrm>
           <a:custGeom>
             <a:avLst/>
@@ -6399,12 +6894,12 @@
             <a:cxnLst/>
             <a:rect l="l" t="t" r="r" b="b"/>
             <a:pathLst>
-              <a:path w="9525" h="3390900">
+              <a:path w="9525" h="3619500">
                 <a:moveTo>
                   <a:pt x="0" y="0"/>
                 </a:moveTo>
                 <a:lnTo>
-                  <a:pt x="0" y="3390900"/>
+                  <a:pt x="0" y="3619500"/>
                 </a:lnTo>
               </a:path>
             </a:pathLst>
@@ -6412,7 +6907,7 @@
           <a:noFill/>
           <a:ln w="7620">
             <a:solidFill>
-              <a:srgbClr val="A8B4D5"/>
+              <a:srgbClr val="E7E7E7"/>
             </a:solidFill>
             <a:custDash>
               <a:ds d="250000" sp="375000"/>
@@ -6428,7 +6923,7 @@
         </p:nvSpPr>
         <p:spPr>
           <a:xfrm>
-            <a:off x="6535150" y="1794510"/>
+            <a:off x="6439900" y="1318260"/>
             <a:ext cx="340901" cy="243840"/>
           </a:xfrm>
           <a:prstGeom prst="rect">
@@ -6449,10 +6944,10 @@
             <a:r>
               <a:rPr lang="zh-CN" sz="1200" dirty="0">
                 <a:solidFill>
-                  <a:srgbClr val="F5DC49"/>
+                  <a:srgbClr val="262626"/>
                 </a:solidFill>
                 <a:latin typeface="Manrope"/>
-                <a:ea typeface="Microsoft YaHei"/>
+                <a:ea typeface="Zen Kaku Gothic New"/>
                 <a:cs typeface="Manrope"/>
               </a:rPr>
               <a:t>2週</a:t>
@@ -6468,8 +6963,8 @@
         </p:nvSpPr>
         <p:spPr>
           <a:xfrm>
-            <a:off x="9258300" y="2133600"/>
-            <a:ext cx="9525" cy="3390900"/>
+            <a:off x="9115425" y="1657350"/>
+            <a:ext cx="9525" cy="3619500"/>
           </a:xfrm>
           <a:custGeom>
             <a:avLst/>
@@ -6478,12 +6973,12 @@
             <a:cxnLst/>
             <a:rect l="l" t="t" r="r" b="b"/>
             <a:pathLst>
-              <a:path w="9525" h="3390900">
+              <a:path w="9525" h="3619500">
                 <a:moveTo>
                   <a:pt x="0" y="0"/>
                 </a:moveTo>
                 <a:lnTo>
-                  <a:pt x="0" y="3390900"/>
+                  <a:pt x="0" y="3619500"/>
                 </a:lnTo>
               </a:path>
             </a:pathLst>
@@ -6491,7 +6986,7 @@
           <a:noFill/>
           <a:ln w="7620">
             <a:solidFill>
-              <a:srgbClr val="A8B4D5"/>
+              <a:srgbClr val="E7E7E7"/>
             </a:solidFill>
             <a:custDash>
               <a:ds d="250000" sp="375000"/>
@@ -6507,7 +7002,7 @@
         </p:nvSpPr>
         <p:spPr>
           <a:xfrm>
-            <a:off x="9087850" y="1794510"/>
+            <a:off x="8944975" y="1318260"/>
             <a:ext cx="340901" cy="243840"/>
           </a:xfrm>
           <a:prstGeom prst="rect">
@@ -6528,10 +7023,10 @@
             <a:r>
               <a:rPr lang="zh-CN" sz="1200" dirty="0">
                 <a:solidFill>
-                  <a:srgbClr val="F5DC49"/>
+                  <a:srgbClr val="262626"/>
                 </a:solidFill>
                 <a:latin typeface="Manrope"/>
-                <a:ea typeface="Microsoft YaHei"/>
+                <a:ea typeface="Zen Kaku Gothic New"/>
                 <a:cs typeface="Manrope"/>
               </a:rPr>
               <a:t>3週</a:t>
@@ -6547,8 +7042,8 @@
         </p:nvSpPr>
         <p:spPr>
           <a:xfrm>
-            <a:off x="11811000" y="2133600"/>
-            <a:ext cx="9525" cy="3390900"/>
+            <a:off x="11620500" y="1657350"/>
+            <a:ext cx="9525" cy="3619500"/>
           </a:xfrm>
           <a:custGeom>
             <a:avLst/>
@@ -6557,12 +7052,12 @@
             <a:cxnLst/>
             <a:rect l="l" t="t" r="r" b="b"/>
             <a:pathLst>
-              <a:path w="9525" h="3390900">
+              <a:path w="9525" h="3619500">
                 <a:moveTo>
                   <a:pt x="0" y="0"/>
                 </a:moveTo>
                 <a:lnTo>
-                  <a:pt x="0" y="3390900"/>
+                  <a:pt x="0" y="3619500"/>
                 </a:lnTo>
               </a:path>
             </a:pathLst>
@@ -6570,7 +7065,7 @@
           <a:noFill/>
           <a:ln w="7620">
             <a:solidFill>
-              <a:srgbClr val="A8B4D5"/>
+              <a:srgbClr val="E7E7E7"/>
             </a:solidFill>
             <a:custDash>
               <a:ds d="250000" sp="375000"/>
@@ -6586,7 +7081,7 @@
         </p:nvSpPr>
         <p:spPr>
           <a:xfrm>
-            <a:off x="11485339" y="1794510"/>
+            <a:off x="11450050" y="1318260"/>
             <a:ext cx="340901" cy="243840"/>
           </a:xfrm>
           <a:prstGeom prst="rect">
@@ -6603,14 +7098,14 @@
           </a:bodyPr>
           <a:lstStyle/>
           <a:p>
-            <a:pPr algn="r"/>
+            <a:pPr algn="ctr"/>
             <a:r>
               <a:rPr lang="zh-CN" sz="1200" dirty="0">
                 <a:solidFill>
-                  <a:srgbClr val="F5DC49"/>
+                  <a:srgbClr val="262626"/>
                 </a:solidFill>
                 <a:latin typeface="Manrope"/>
-                <a:ea typeface="Microsoft YaHei"/>
+                <a:ea typeface="Zen Kaku Gothic New"/>
                 <a:cs typeface="Manrope"/>
               </a:rPr>
               <a:t>4週</a:t>
@@ -6626,8 +7121,8 @@
         </p:nvSpPr>
         <p:spPr>
           <a:xfrm>
-            <a:off x="422910" y="2612072"/>
-            <a:ext cx="439781" cy="243840"/>
+            <a:off x="422910" y="2173922"/>
+            <a:ext cx="688571" cy="243840"/>
           </a:xfrm>
           <a:prstGeom prst="rect">
             <a:avLst/>
@@ -6647,13 +7142,13 @@
             <a:r>
               <a:rPr lang="zh-CN" sz="1200" b="1" dirty="0">
                 <a:solidFill>
-                  <a:srgbClr val="F3F0E3"/>
-                </a:solidFill>
-                <a:latin typeface="Zen Kaku Gothic New"/>
-                <a:ea typeface="Microsoft YaHei"/>
-                <a:cs typeface="Zen Kaku Gothic New"/>
+                  <a:srgbClr val="262626"/>
+                </a:solidFill>
+                <a:latin typeface="Manrope"/>
+                <a:ea typeface="Zen Kaku Gothic New"/>
+                <a:cs typeface="Manrope"/>
               </a:rPr>
-              <a:t>取組</a:t>
+              <a:t>取り組み</a:t>
             </a:r>
           </a:p>
         </p:txBody>
@@ -6666,18 +7161,18 @@
         </p:nvSpPr>
         <p:spPr>
           <a:xfrm>
-            <a:off x="1600200" y="2574608"/>
-            <a:ext cx="2552700" cy="247650"/>
+            <a:off x="1600200" y="2136458"/>
+            <a:ext cx="2505075" cy="247650"/>
           </a:xfrm>
           <a:prstGeom prst="rect">
             <a:avLst/>
           </a:prstGeom>
           <a:solidFill>
-            <a:srgbClr val="1A2546"/>
+            <a:srgbClr val="FFFFFF"/>
           </a:solidFill>
           <a:ln w="13335">
             <a:solidFill>
-              <a:srgbClr val="F5DC49"/>
+              <a:srgbClr val="9B9B9B"/>
             </a:solidFill>
             <a:custDash>
               <a:ds d="357142" sp="214285"/>
@@ -6693,8 +7188,8 @@
         </p:nvSpPr>
         <p:spPr>
           <a:xfrm>
-            <a:off x="2656660" y="2607310"/>
-            <a:ext cx="439781" cy="243840"/>
+            <a:off x="2263572" y="2185352"/>
+            <a:ext cx="1178330" cy="213360"/>
           </a:xfrm>
           <a:prstGeom prst="rect">
             <a:avLst/>
@@ -6712,15 +7207,15 @@
           <a:p>
             <a:pPr algn="ctr"/>
             <a:r>
-              <a:rPr lang="zh-CN" sz="1200" b="1" dirty="0">
-                <a:solidFill>
-                  <a:srgbClr val="F3F0E3"/>
-                </a:solidFill>
-                <a:latin typeface="Zen Kaku Gothic New"/>
-                <a:ea typeface="Microsoft YaHei"/>
-                <a:cs typeface="Zen Kaku Gothic New"/>
+              <a:rPr lang="zh-CN" sz="1050" b="1" dirty="0">
+                <a:solidFill>
+                  <a:srgbClr val="262626"/>
+                </a:solidFill>
+                <a:latin typeface="Manrope"/>
+                <a:ea typeface="Zen Kaku Gothic New"/>
+                <a:cs typeface="Manrope"/>
               </a:rPr>
-              <a:t>観察</a:t>
+              <a:t>今の朝を観察する</a:t>
             </a:r>
           </a:p>
         </p:txBody>
@@ -6733,18 +7228,18 @@
         </p:nvSpPr>
         <p:spPr>
           <a:xfrm>
-            <a:off x="4152900" y="2574608"/>
-            <a:ext cx="5105400" cy="247650"/>
+            <a:off x="4105275" y="2136458"/>
+            <a:ext cx="5010150" cy="247650"/>
           </a:xfrm>
           <a:prstGeom prst="rect">
             <a:avLst/>
           </a:prstGeom>
           <a:solidFill>
-            <a:srgbClr val="1A2546"/>
+            <a:srgbClr val="FFFFFF"/>
           </a:solidFill>
           <a:ln w="13335">
             <a:solidFill>
-              <a:srgbClr val="F5DC49"/>
+              <a:srgbClr val="9B9B9B"/>
             </a:solidFill>
             <a:custDash>
               <a:ds d="357142" sp="214285"/>
@@ -6760,8 +7255,8 @@
         </p:nvSpPr>
         <p:spPr>
           <a:xfrm>
-            <a:off x="6361314" y="2607310"/>
-            <a:ext cx="688571" cy="243840"/>
+            <a:off x="6021185" y="2185352"/>
+            <a:ext cx="1178330" cy="213360"/>
           </a:xfrm>
           <a:prstGeom prst="rect">
             <a:avLst/>
@@ -6779,15 +7274,15 @@
           <a:p>
             <a:pPr algn="ctr"/>
             <a:r>
-              <a:rPr lang="zh-CN" sz="1200" b="1" dirty="0">
-                <a:solidFill>
-                  <a:srgbClr val="F3F0E3"/>
-                </a:solidFill>
-                <a:latin typeface="Zen Kaku Gothic New"/>
-                <a:ea typeface="Microsoft YaHei"/>
-                <a:cs typeface="Zen Kaku Gothic New"/>
+              <a:rPr lang="zh-CN" sz="1050" b="1" dirty="0">
+                <a:solidFill>
+                  <a:srgbClr val="262626"/>
+                </a:solidFill>
+                <a:latin typeface="Manrope"/>
+                <a:ea typeface="Zen Kaku Gothic New"/>
+                <a:cs typeface="Manrope"/>
               </a:rPr>
-              <a:t>一つ試す</a:t>
+              <a:t>一つの作業を試す</a:t>
             </a:r>
           </a:p>
         </p:txBody>
@@ -6800,18 +7295,18 @@
         </p:nvSpPr>
         <p:spPr>
           <a:xfrm>
-            <a:off x="9258300" y="2574608"/>
-            <a:ext cx="2552700" cy="247650"/>
+            <a:off x="9115425" y="2136458"/>
+            <a:ext cx="2505075" cy="247650"/>
           </a:xfrm>
           <a:prstGeom prst="rect">
             <a:avLst/>
           </a:prstGeom>
           <a:solidFill>
-            <a:srgbClr val="1A2546"/>
+            <a:srgbClr val="FFFFFF"/>
           </a:solidFill>
           <a:ln w="13335">
             <a:solidFill>
-              <a:srgbClr val="F5DC49"/>
+              <a:srgbClr val="9B9B9B"/>
             </a:solidFill>
             <a:custDash>
               <a:ds d="357142" sp="214285"/>
@@ -6827,8 +7322,8 @@
         </p:nvSpPr>
         <p:spPr>
           <a:xfrm>
-            <a:off x="10252562" y="2607310"/>
-            <a:ext cx="564176" cy="243840"/>
+            <a:off x="9922755" y="2185352"/>
+            <a:ext cx="890415" cy="213360"/>
           </a:xfrm>
           <a:prstGeom prst="rect">
             <a:avLst/>
@@ -6846,15 +7341,15 @@
           <a:p>
             <a:pPr algn="ctr"/>
             <a:r>
-              <a:rPr lang="zh-CN" sz="1200" b="1" dirty="0">
-                <a:solidFill>
-                  <a:srgbClr val="F3F0E3"/>
-                </a:solidFill>
-                <a:latin typeface="Zen Kaku Gothic New"/>
-                <a:ea typeface="Microsoft YaHei"/>
-                <a:cs typeface="Zen Kaku Gothic New"/>
+              <a:rPr lang="zh-CN" sz="1050" b="1" dirty="0">
+                <a:solidFill>
+                  <a:srgbClr val="262626"/>
+                </a:solidFill>
+                <a:latin typeface="Manrope"/>
+                <a:ea typeface="Zen Kaku Gothic New"/>
+                <a:cs typeface="Manrope"/>
               </a:rPr>
-              <a:t>続け方</a:t>
+              <a:t>続け方を話す</a:t>
             </a:r>
           </a:p>
         </p:txBody>
@@ -6867,7 +7362,611 @@
         </p:nvSpPr>
         <p:spPr>
           <a:xfrm>
-            <a:off x="381000" y="3263900"/>
+            <a:off x="381000" y="2863850"/>
+            <a:ext cx="11239500" cy="9525"/>
+          </a:xfrm>
+          <a:custGeom>
+            <a:avLst/>
+            <a:gdLst/>
+            <a:ahLst/>
+            <a:cxnLst/>
+            <a:rect l="l" t="t" r="r" b="b"/>
+            <a:pathLst>
+              <a:path w="11239500" h="9525">
+                <a:moveTo>
+                  <a:pt x="0" y="0"/>
+                </a:moveTo>
+                <a:lnTo>
+                  <a:pt x="11239500" y="0"/>
+                </a:lnTo>
+              </a:path>
+            </a:pathLst>
+          </a:custGeom>
+          <a:noFill/>
+          <a:ln w="9525">
+            <a:solidFill>
+              <a:srgbClr val="E7E7E7"/>
+            </a:solidFill>
+          </a:ln>
+        </p:spPr>
+      </p:sp>
+      <p:sp>
+        <p:nvSpPr>
+          <p:cNvPr id="27" name="Rectangle 27"/>
+          <p:cNvSpPr/>
+          <p:nvPr/>
+        </p:nvSpPr>
+        <p:spPr>
+          <a:xfrm>
+            <a:off x="381000" y="2864168"/>
+            <a:ext cx="11239500" cy="1206818"/>
+          </a:xfrm>
+          <a:prstGeom prst="rect">
+            <a:avLst/>
+          </a:prstGeom>
+          <a:solidFill>
+            <a:srgbClr val="F3F3F3">
+              <a:alpha val="60000"/>
+            </a:srgbClr>
+          </a:solidFill>
+          <a:ln>
+            <a:noFill/>
+          </a:ln>
+        </p:spPr>
+      </p:sp>
+      <p:sp>
+        <p:nvSpPr>
+          <p:cNvPr id="28" name="TextBox 28"/>
+          <p:cNvSpPr txBox="1"/>
+          <p:nvPr/>
+        </p:nvSpPr>
+        <p:spPr>
+          <a:xfrm>
+            <a:off x="422910" y="3380422"/>
+            <a:ext cx="439781" cy="243840"/>
+          </a:xfrm>
+          <a:prstGeom prst="rect">
+            <a:avLst/>
+          </a:prstGeom>
+          <a:noFill/>
+          <a:ln>
+            <a:noFill/>
+          </a:ln>
+        </p:spPr>
+        <p:txBody>
+          <a:bodyPr wrap="none" lIns="0" tIns="0" rIns="0" bIns="0" anchor="t" anchorCtr="0">
+            <a:spAutoFit/>
+          </a:bodyPr>
+          <a:lstStyle/>
+          <a:p>
+            <a:pPr algn="l"/>
+            <a:r>
+              <a:rPr lang="zh-CN" sz="1200" b="1" dirty="0">
+                <a:solidFill>
+                  <a:srgbClr val="262626"/>
+                </a:solidFill>
+                <a:latin typeface="Manrope"/>
+                <a:ea typeface="Zen Kaku Gothic New"/>
+                <a:cs typeface="Manrope"/>
+              </a:rPr>
+              <a:t>記録</a:t>
+            </a:r>
+          </a:p>
+        </p:txBody>
+      </p:sp>
+      <p:sp>
+        <p:nvSpPr>
+          <p:cNvPr id="29" name="Rectangle 29"/>
+          <p:cNvSpPr/>
+          <p:nvPr/>
+        </p:nvSpPr>
+        <p:spPr>
+          <a:xfrm>
+            <a:off x="1600200" y="3343275"/>
+            <a:ext cx="10020300" cy="247650"/>
+          </a:xfrm>
+          <a:prstGeom prst="rect">
+            <a:avLst/>
+          </a:prstGeom>
+          <a:solidFill>
+            <a:srgbClr val="FFFFFF"/>
+          </a:solidFill>
+          <a:ln w="13335">
+            <a:solidFill>
+              <a:srgbClr val="9B9B9B"/>
+            </a:solidFill>
+            <a:custDash>
+              <a:ds d="357142" sp="214285"/>
+            </a:custDash>
+          </a:ln>
+        </p:spPr>
+      </p:sp>
+      <p:sp>
+        <p:nvSpPr>
+          <p:cNvPr id="30" name="TextBox 30"/>
+          <p:cNvSpPr txBox="1"/>
+          <p:nvPr/>
+        </p:nvSpPr>
+        <p:spPr>
+          <a:xfrm>
+            <a:off x="5966762" y="3391852"/>
+            <a:ext cx="1287176" cy="213360"/>
+          </a:xfrm>
+          <a:prstGeom prst="rect">
+            <a:avLst/>
+          </a:prstGeom>
+          <a:noFill/>
+          <a:ln>
+            <a:noFill/>
+          </a:ln>
+        </p:spPr>
+        <p:txBody>
+          <a:bodyPr wrap="none" lIns="0" tIns="0" rIns="0" bIns="0" anchor="t" anchorCtr="0">
+            <a:spAutoFit/>
+          </a:bodyPr>
+          <a:lstStyle/>
+          <a:p>
+            <a:pPr algn="ctr"/>
+            <a:r>
+              <a:rPr lang="zh-CN" sz="1050" b="1" dirty="0">
+                <a:solidFill>
+                  <a:srgbClr val="262626"/>
+                </a:solidFill>
+                <a:latin typeface="Manrope"/>
+                <a:ea typeface="Zen Kaku Gothic New"/>
+                <a:cs typeface="Manrope"/>
+              </a:rPr>
+              <a:t>その日の一言を残す</a:t>
+            </a:r>
+          </a:p>
+        </p:txBody>
+      </p:sp>
+      <p:sp>
+        <p:nvSpPr>
+          <p:cNvPr id="31" name="Line 31"/>
+          <p:cNvSpPr/>
+          <p:nvPr/>
+        </p:nvSpPr>
+        <p:spPr>
+          <a:xfrm>
+            <a:off x="381000" y="4070350"/>
+            <a:ext cx="11239500" cy="9525"/>
+          </a:xfrm>
+          <a:custGeom>
+            <a:avLst/>
+            <a:gdLst/>
+            <a:ahLst/>
+            <a:cxnLst/>
+            <a:rect l="l" t="t" r="r" b="b"/>
+            <a:pathLst>
+              <a:path w="11239500" h="9525">
+                <a:moveTo>
+                  <a:pt x="0" y="0"/>
+                </a:moveTo>
+                <a:lnTo>
+                  <a:pt x="11239500" y="0"/>
+                </a:lnTo>
+              </a:path>
+            </a:pathLst>
+          </a:custGeom>
+          <a:noFill/>
+          <a:ln w="9525">
+            <a:solidFill>
+              <a:srgbClr val="E7E7E7"/>
+            </a:solidFill>
+          </a:ln>
+        </p:spPr>
+      </p:sp>
+      <p:sp>
+        <p:nvSpPr>
+          <p:cNvPr id="32" name="TextBox 32"/>
+          <p:cNvSpPr txBox="1"/>
+          <p:nvPr/>
+        </p:nvSpPr>
+        <p:spPr>
+          <a:xfrm>
+            <a:off x="422910" y="4586922"/>
+            <a:ext cx="439781" cy="243840"/>
+          </a:xfrm>
+          <a:prstGeom prst="rect">
+            <a:avLst/>
+          </a:prstGeom>
+          <a:noFill/>
+          <a:ln>
+            <a:noFill/>
+          </a:ln>
+        </p:spPr>
+        <p:txBody>
+          <a:bodyPr wrap="none" lIns="0" tIns="0" rIns="0" bIns="0" anchor="t" anchorCtr="0">
+            <a:spAutoFit/>
+          </a:bodyPr>
+          <a:lstStyle/>
+          <a:p>
+            <a:pPr algn="l"/>
+            <a:r>
+              <a:rPr lang="zh-CN" sz="1200" b="1" dirty="0">
+                <a:solidFill>
+                  <a:srgbClr val="262626"/>
+                </a:solidFill>
+                <a:latin typeface="Manrope"/>
+                <a:ea typeface="Zen Kaku Gothic New"/>
+                <a:cs typeface="Manrope"/>
+              </a:rPr>
+              <a:t>相談</a:t>
+            </a:r>
+          </a:p>
+        </p:txBody>
+      </p:sp>
+      <p:sp>
+        <p:nvSpPr>
+          <p:cNvPr id="33" name="Rectangle 33"/>
+          <p:cNvSpPr/>
+          <p:nvPr/>
+        </p:nvSpPr>
+        <p:spPr>
+          <a:xfrm>
+            <a:off x="4105275" y="4550092"/>
+            <a:ext cx="2505075" cy="247650"/>
+          </a:xfrm>
+          <a:prstGeom prst="rect">
+            <a:avLst/>
+          </a:prstGeom>
+          <a:solidFill>
+            <a:srgbClr val="FFFFFF"/>
+          </a:solidFill>
+          <a:ln w="13335">
+            <a:solidFill>
+              <a:srgbClr val="9B9B9B"/>
+            </a:solidFill>
+            <a:custDash>
+              <a:ds d="357142" sp="214285"/>
+            </a:custDash>
+          </a:ln>
+        </p:spPr>
+      </p:sp>
+      <p:sp>
+        <p:nvSpPr>
+          <p:cNvPr id="34" name="TextBox 34"/>
+          <p:cNvSpPr txBox="1"/>
+          <p:nvPr/>
+        </p:nvSpPr>
+        <p:spPr>
+          <a:xfrm>
+            <a:off x="4823070" y="4598352"/>
+            <a:ext cx="1069484" cy="213360"/>
+          </a:xfrm>
+          <a:prstGeom prst="rect">
+            <a:avLst/>
+          </a:prstGeom>
+          <a:noFill/>
+          <a:ln>
+            <a:noFill/>
+          </a:ln>
+        </p:spPr>
+        <p:txBody>
+          <a:bodyPr wrap="none" lIns="0" tIns="0" rIns="0" bIns="0" anchor="t" anchorCtr="0">
+            <a:spAutoFit/>
+          </a:bodyPr>
+          <a:lstStyle/>
+          <a:p>
+            <a:pPr algn="ctr"/>
+            <a:r>
+              <a:rPr lang="zh-CN" sz="1050" b="1" dirty="0">
+                <a:solidFill>
+                  <a:srgbClr val="262626"/>
+                </a:solidFill>
+                <a:latin typeface="Manrope"/>
+                <a:ea typeface="Zen Kaku Gothic New"/>
+                <a:cs typeface="Manrope"/>
+              </a:rPr>
+              <a:t>途中で相談する</a:t>
+            </a:r>
+          </a:p>
+        </p:txBody>
+      </p:sp>
+      <p:sp>
+        <p:nvSpPr>
+          <p:cNvPr id="35" name="Rectangle 35"/>
+          <p:cNvSpPr/>
+          <p:nvPr/>
+        </p:nvSpPr>
+        <p:spPr>
+          <a:xfrm>
+            <a:off x="9115425" y="4550092"/>
+            <a:ext cx="2505075" cy="247650"/>
+          </a:xfrm>
+          <a:prstGeom prst="rect">
+            <a:avLst/>
+          </a:prstGeom>
+          <a:solidFill>
+            <a:srgbClr val="FFFFFF"/>
+          </a:solidFill>
+          <a:ln w="13335">
+            <a:solidFill>
+              <a:srgbClr val="9B9B9B"/>
+            </a:solidFill>
+            <a:custDash>
+              <a:ds d="357142" sp="214285"/>
+            </a:custDash>
+          </a:ln>
+        </p:spPr>
+      </p:sp>
+      <p:sp>
+        <p:nvSpPr>
+          <p:cNvPr id="36" name="TextBox 36"/>
+          <p:cNvSpPr txBox="1"/>
+          <p:nvPr/>
+        </p:nvSpPr>
+        <p:spPr>
+          <a:xfrm>
+            <a:off x="9833220" y="4598352"/>
+            <a:ext cx="1069484" cy="213360"/>
+          </a:xfrm>
+          <a:prstGeom prst="rect">
+            <a:avLst/>
+          </a:prstGeom>
+          <a:noFill/>
+          <a:ln>
+            <a:noFill/>
+          </a:ln>
+        </p:spPr>
+        <p:txBody>
+          <a:bodyPr wrap="none" lIns="0" tIns="0" rIns="0" bIns="0" anchor="t" anchorCtr="0">
+            <a:spAutoFit/>
+          </a:bodyPr>
+          <a:lstStyle/>
+          <a:p>
+            <a:pPr algn="ctr"/>
+            <a:r>
+              <a:rPr lang="zh-CN" sz="1050" b="1" dirty="0">
+                <a:solidFill>
+                  <a:srgbClr val="262626"/>
+                </a:solidFill>
+                <a:latin typeface="Manrope"/>
+                <a:ea typeface="Zen Kaku Gothic New"/>
+                <a:cs typeface="Manrope"/>
+              </a:rPr>
+              <a:t>四週を振り返る</a:t>
+            </a:r>
+          </a:p>
+        </p:txBody>
+      </p:sp>
+      <p:sp>
+        <p:nvSpPr>
+          <p:cNvPr id="37" name="Line 37"/>
+          <p:cNvSpPr/>
+          <p:nvPr/>
+        </p:nvSpPr>
+        <p:spPr>
+          <a:xfrm>
+            <a:off x="381000" y="5276850"/>
+            <a:ext cx="11239500" cy="9525"/>
+          </a:xfrm>
+          <a:custGeom>
+            <a:avLst/>
+            <a:gdLst/>
+            <a:ahLst/>
+            <a:cxnLst/>
+            <a:rect l="l" t="t" r="r" b="b"/>
+            <a:pathLst>
+              <a:path w="11239500" h="9525">
+                <a:moveTo>
+                  <a:pt x="0" y="0"/>
+                </a:moveTo>
+                <a:lnTo>
+                  <a:pt x="11239500" y="0"/>
+                </a:lnTo>
+              </a:path>
+            </a:pathLst>
+          </a:custGeom>
+          <a:noFill/>
+          <a:ln w="9525">
+            <a:solidFill>
+              <a:srgbClr val="E7E7E7"/>
+            </a:solidFill>
+          </a:ln>
+        </p:spPr>
+      </p:sp>
+      <p:sp>
+        <p:nvSpPr>
+          <p:cNvPr id="38" name="Rectangle 38"/>
+          <p:cNvSpPr/>
+          <p:nvPr/>
+        </p:nvSpPr>
+        <p:spPr>
+          <a:xfrm>
+            <a:off x="1600200" y="5353050"/>
+            <a:ext cx="171450" cy="95250"/>
+          </a:xfrm>
+          <a:prstGeom prst="rect">
+            <a:avLst/>
+          </a:prstGeom>
+          <a:solidFill>
+            <a:srgbClr val="9B9B9B"/>
+          </a:solidFill>
+          <a:ln>
+            <a:noFill/>
+          </a:ln>
+        </p:spPr>
+      </p:sp>
+      <p:sp>
+        <p:nvSpPr>
+          <p:cNvPr id="39" name="TextBox 39"/>
+          <p:cNvSpPr txBox="1"/>
+          <p:nvPr/>
+        </p:nvSpPr>
+        <p:spPr>
+          <a:xfrm>
+            <a:off x="1815465" y="5334952"/>
+            <a:ext cx="702402" cy="213360"/>
+          </a:xfrm>
+          <a:prstGeom prst="rect">
+            <a:avLst/>
+          </a:prstGeom>
+          <a:noFill/>
+          <a:ln>
+            <a:noFill/>
+          </a:ln>
+        </p:spPr>
+        <p:txBody>
+          <a:bodyPr wrap="none" lIns="0" tIns="0" rIns="0" bIns="0" anchor="t" anchorCtr="0">
+            <a:spAutoFit/>
+          </a:bodyPr>
+          <a:lstStyle/>
+          <a:p>
+            <a:pPr algn="l"/>
+            <a:r>
+              <a:rPr lang="zh-CN" sz="1050" dirty="0">
+                <a:solidFill>
+                  <a:srgbClr val="262626"/>
+                </a:solidFill>
+                <a:latin typeface="Manrope"/>
+                <a:ea typeface="Zen Kaku Gothic New"/>
+                <a:cs typeface="Manrope"/>
+              </a:rPr>
+              <a:t>実施確定</a:t>
+            </a:r>
+          </a:p>
+        </p:txBody>
+      </p:sp>
+      <p:sp>
+        <p:nvSpPr>
+          <p:cNvPr id="40" name="Rectangle 40"/>
+          <p:cNvSpPr/>
+          <p:nvPr/>
+        </p:nvSpPr>
+        <p:spPr>
+          <a:xfrm>
+            <a:off x="2371725" y="5353050"/>
+            <a:ext cx="171450" cy="95250"/>
+          </a:xfrm>
+          <a:prstGeom prst="rect">
+            <a:avLst/>
+          </a:prstGeom>
+          <a:solidFill>
+            <a:srgbClr val="C8C8C8"/>
+          </a:solidFill>
+          <a:ln>
+            <a:noFill/>
+          </a:ln>
+        </p:spPr>
+      </p:sp>
+      <p:sp>
+        <p:nvSpPr>
+          <p:cNvPr id="41" name="TextBox 41"/>
+          <p:cNvSpPr txBox="1"/>
+          <p:nvPr/>
+        </p:nvSpPr>
+        <p:spPr>
+          <a:xfrm>
+            <a:off x="2586990" y="5334952"/>
+            <a:ext cx="364536" cy="213360"/>
+          </a:xfrm>
+          <a:prstGeom prst="rect">
+            <a:avLst/>
+          </a:prstGeom>
+          <a:noFill/>
+          <a:ln>
+            <a:noFill/>
+          </a:ln>
+        </p:spPr>
+        <p:txBody>
+          <a:bodyPr wrap="none" lIns="0" tIns="0" rIns="0" bIns="0" anchor="t" anchorCtr="0">
+            <a:spAutoFit/>
+          </a:bodyPr>
+          <a:lstStyle/>
+          <a:p>
+            <a:pPr algn="l"/>
+            <a:r>
+              <a:rPr lang="zh-CN" sz="1050" dirty="0">
+                <a:solidFill>
+                  <a:srgbClr val="262626"/>
+                </a:solidFill>
+                <a:latin typeface="Manrope"/>
+                <a:ea typeface="Zen Kaku Gothic New"/>
+                <a:cs typeface="Manrope"/>
+              </a:rPr>
+              <a:t>計画</a:t>
+            </a:r>
+          </a:p>
+        </p:txBody>
+      </p:sp>
+      <p:sp>
+        <p:nvSpPr>
+          <p:cNvPr id="42" name="Rectangle 42"/>
+          <p:cNvSpPr/>
+          <p:nvPr/>
+        </p:nvSpPr>
+        <p:spPr>
+          <a:xfrm>
+            <a:off x="3143250" y="5353050"/>
+            <a:ext cx="171450" cy="95250"/>
+          </a:xfrm>
+          <a:prstGeom prst="rect">
+            <a:avLst/>
+          </a:prstGeom>
+          <a:solidFill>
+            <a:srgbClr val="FFFFFF"/>
+          </a:solidFill>
+          <a:ln w="11430">
+            <a:solidFill>
+              <a:srgbClr val="9B9B9B"/>
+            </a:solidFill>
+            <a:custDash>
+              <a:ds d="333333" sp="250000"/>
+            </a:custDash>
+          </a:ln>
+        </p:spPr>
+      </p:sp>
+      <p:sp>
+        <p:nvSpPr>
+          <p:cNvPr id="43" name="TextBox 43"/>
+          <p:cNvSpPr txBox="1"/>
+          <p:nvPr/>
+        </p:nvSpPr>
+        <p:spPr>
+          <a:xfrm>
+            <a:off x="3358515" y="5334952"/>
+            <a:ext cx="364536" cy="213360"/>
+          </a:xfrm>
+          <a:prstGeom prst="rect">
+            <a:avLst/>
+          </a:prstGeom>
+          <a:noFill/>
+          <a:ln>
+            <a:noFill/>
+          </a:ln>
+        </p:spPr>
+        <p:txBody>
+          <a:bodyPr wrap="none" lIns="0" tIns="0" rIns="0" bIns="0" anchor="t" anchorCtr="0">
+            <a:spAutoFit/>
+          </a:bodyPr>
+          <a:lstStyle/>
+          <a:p>
+            <a:pPr algn="l"/>
+            <a:r>
+              <a:rPr lang="zh-CN" sz="1050" dirty="0">
+                <a:solidFill>
+                  <a:srgbClr val="262626"/>
+                </a:solidFill>
+                <a:latin typeface="Manrope"/>
+                <a:ea typeface="Zen Kaku Gothic New"/>
+                <a:cs typeface="Manrope"/>
+              </a:rPr>
+              <a:t>提案</a:t>
+            </a:r>
+          </a:p>
+        </p:txBody>
+      </p:sp>
+      <p:sp>
+        <p:nvSpPr>
+          <p:cNvPr id="44" name="Line 44"/>
+          <p:cNvSpPr/>
+          <p:nvPr/>
+        </p:nvSpPr>
+        <p:spPr>
+          <a:xfrm>
+            <a:off x="381000" y="6572250"/>
             <a:ext cx="11430000" cy="9525"/>
           </a:xfrm>
           <a:custGeom>
@@ -6890,45 +7989,21 @@
           <a:noFill/>
           <a:ln w="9525">
             <a:solidFill>
-              <a:srgbClr val="A8B4D5"/>
+              <a:srgbClr val="E7E7E7"/>
             </a:solidFill>
           </a:ln>
         </p:spPr>
       </p:sp>
       <p:sp>
         <p:nvSpPr>
-          <p:cNvPr id="27" name="Rectangle 27"/>
-          <p:cNvSpPr/>
-          <p:nvPr/>
-        </p:nvSpPr>
-        <p:spPr>
-          <a:xfrm>
-            <a:off x="381000" y="3264218"/>
-            <a:ext cx="11430000" cy="1130618"/>
-          </a:xfrm>
-          <a:prstGeom prst="rect">
-            <a:avLst/>
-          </a:prstGeom>
-          <a:solidFill>
-            <a:srgbClr val="243454">
-              <a:alpha val="60000"/>
-            </a:srgbClr>
-          </a:solidFill>
-          <a:ln>
-            <a:noFill/>
-          </a:ln>
-        </p:spPr>
-      </p:sp>
-      <p:sp>
-        <p:nvSpPr>
-          <p:cNvPr id="28" name="TextBox 28"/>
+          <p:cNvPr id="45" name="TextBox 45"/>
           <p:cNvSpPr txBox="1"/>
           <p:nvPr/>
         </p:nvSpPr>
         <p:spPr>
           <a:xfrm>
-            <a:off x="422910" y="3742372"/>
-            <a:ext cx="439781" cy="243840"/>
+            <a:off x="370522" y="6664166"/>
+            <a:ext cx="3297642" cy="167640"/>
           </a:xfrm>
           <a:prstGeom prst="rect">
             <a:avLst/>
@@ -6946,56 +8021,29 @@
           <a:p>
             <a:pPr algn="l"/>
             <a:r>
-              <a:rPr lang="zh-CN" sz="1200" b="1" dirty="0">
-                <a:solidFill>
-                  <a:srgbClr val="F3F0E3"/>
-                </a:solidFill>
-                <a:latin typeface="Zen Kaku Gothic New"/>
-                <a:ea typeface="Microsoft YaHei"/>
-                <a:cs typeface="Zen Kaku Gothic New"/>
+              <a:rPr lang="zh-CN" sz="825" dirty="0">
+                <a:solidFill>
+                  <a:srgbClr val="6E6E6E"/>
+                </a:solidFill>
+                <a:latin typeface="Manrope"/>
+                <a:ea typeface="Zen Kaku Gothic New"/>
+                <a:cs typeface="Manrope"/>
               </a:rPr>
-              <a:t>記録</a:t>
-            </a:r>
-          </a:p>
-        </p:txBody>
-      </p:sp>
-      <p:sp>
-        <p:nvSpPr>
-          <p:cNvPr id="29" name="Rectangle 29"/>
-          <p:cNvSpPr/>
-          <p:nvPr/>
-        </p:nvSpPr>
-        <p:spPr>
-          <a:xfrm>
-            <a:off x="1600200" y="3705225"/>
-            <a:ext cx="10210800" cy="247650"/>
-          </a:xfrm>
-          <a:prstGeom prst="rect">
-            <a:avLst/>
-          </a:prstGeom>
-          <a:solidFill>
-            <a:srgbClr val="1A2546"/>
-          </a:solidFill>
-          <a:ln w="13335">
-            <a:solidFill>
-              <a:srgbClr val="F5DC49"/>
-            </a:solidFill>
-            <a:custDash>
-              <a:ds d="357142" sp="214285"/>
-            </a:custDash>
-          </a:ln>
-        </p:spPr>
-      </p:sp>
-      <p:sp>
-        <p:nvSpPr>
-          <p:cNvPr id="30" name="TextBox 30"/>
+              <a:t>出典：架空のワークショップ案。時間配分は例示で効果は未測定</a:t>
+            </a:r>
+          </a:p>
+        </p:txBody>
+      </p:sp>
+      <p:sp>
+        <p:nvSpPr>
+          <p:cNvPr id="46" name="TextBox 46"/>
           <p:cNvSpPr txBox="1"/>
           <p:nvPr/>
         </p:nvSpPr>
         <p:spPr>
           <a:xfrm>
-            <a:off x="5970071" y="3737610"/>
-            <a:ext cx="1471058" cy="243840"/>
+            <a:off x="11475196" y="6664166"/>
+            <a:ext cx="346281" cy="167640"/>
           </a:xfrm>
           <a:prstGeom prst="rect">
             <a:avLst/>
@@ -7011,416 +8059,14 @@
           </a:bodyPr>
           <a:lstStyle/>
           <a:p>
-            <a:pPr algn="ctr"/>
-            <a:r>
-              <a:rPr lang="zh-CN" sz="1200" b="1" dirty="0">
-                <a:solidFill>
-                  <a:srgbClr val="F3F0E3"/>
-                </a:solidFill>
-                <a:latin typeface="Zen Kaku Gothic New"/>
-                <a:ea typeface="Microsoft YaHei"/>
-                <a:cs typeface="Zen Kaku Gothic New"/>
-              </a:rPr>
-              <a:t>その日の一言を残す</a:t>
-            </a:r>
-          </a:p>
-        </p:txBody>
-      </p:sp>
-      <p:sp>
-        <p:nvSpPr>
-          <p:cNvPr id="31" name="Line 31"/>
-          <p:cNvSpPr/>
-          <p:nvPr/>
-        </p:nvSpPr>
-        <p:spPr>
-          <a:xfrm>
-            <a:off x="381000" y="4394200"/>
-            <a:ext cx="11430000" cy="9525"/>
-          </a:xfrm>
-          <a:custGeom>
-            <a:avLst/>
-            <a:gdLst/>
-            <a:ahLst/>
-            <a:cxnLst/>
-            <a:rect l="l" t="t" r="r" b="b"/>
-            <a:pathLst>
-              <a:path w="11430000" h="9525">
-                <a:moveTo>
-                  <a:pt x="0" y="0"/>
-                </a:moveTo>
-                <a:lnTo>
-                  <a:pt x="11430000" y="0"/>
-                </a:lnTo>
-              </a:path>
-            </a:pathLst>
-          </a:custGeom>
-          <a:noFill/>
-          <a:ln w="9525">
-            <a:solidFill>
-              <a:srgbClr val="A8B4D5"/>
-            </a:solidFill>
-          </a:ln>
-        </p:spPr>
-      </p:sp>
-      <p:sp>
-        <p:nvSpPr>
-          <p:cNvPr id="32" name="TextBox 32"/>
-          <p:cNvSpPr txBox="1"/>
-          <p:nvPr/>
-        </p:nvSpPr>
-        <p:spPr>
-          <a:xfrm>
-            <a:off x="422910" y="4872673"/>
-            <a:ext cx="439781" cy="243840"/>
-          </a:xfrm>
-          <a:prstGeom prst="rect">
-            <a:avLst/>
-          </a:prstGeom>
-          <a:noFill/>
-          <a:ln>
-            <a:noFill/>
-          </a:ln>
-        </p:spPr>
-        <p:txBody>
-          <a:bodyPr wrap="none" lIns="0" tIns="0" rIns="0" bIns="0" anchor="t" anchorCtr="0">
-            <a:spAutoFit/>
-          </a:bodyPr>
-          <a:lstStyle/>
-          <a:p>
-            <a:pPr algn="l"/>
-            <a:r>
-              <a:rPr lang="zh-CN" sz="1200" b="1" dirty="0">
-                <a:solidFill>
-                  <a:srgbClr val="F3F0E3"/>
-                </a:solidFill>
-                <a:latin typeface="Zen Kaku Gothic New"/>
-                <a:ea typeface="Microsoft YaHei"/>
-                <a:cs typeface="Zen Kaku Gothic New"/>
-              </a:rPr>
-              <a:t>相談</a:t>
-            </a:r>
-          </a:p>
-        </p:txBody>
-      </p:sp>
-      <p:sp>
-        <p:nvSpPr>
-          <p:cNvPr id="33" name="Rectangle 33"/>
-          <p:cNvSpPr/>
-          <p:nvPr/>
-        </p:nvSpPr>
-        <p:spPr>
-          <a:xfrm>
-            <a:off x="4152900" y="4835842"/>
-            <a:ext cx="2552700" cy="247650"/>
-          </a:xfrm>
-          <a:prstGeom prst="rect">
-            <a:avLst/>
-          </a:prstGeom>
-          <a:solidFill>
-            <a:srgbClr val="1A2546"/>
-          </a:solidFill>
-          <a:ln w="13335">
-            <a:solidFill>
-              <a:srgbClr val="F5DC49"/>
-            </a:solidFill>
-            <a:custDash>
-              <a:ds d="357142" sp="214285"/>
-            </a:custDash>
-          </a:ln>
-        </p:spPr>
-      </p:sp>
-      <p:sp>
-        <p:nvSpPr>
-          <p:cNvPr id="34" name="TextBox 34"/>
-          <p:cNvSpPr txBox="1"/>
-          <p:nvPr/>
-        </p:nvSpPr>
-        <p:spPr>
-          <a:xfrm>
-            <a:off x="4942512" y="4867910"/>
-            <a:ext cx="973477" cy="243840"/>
-          </a:xfrm>
-          <a:prstGeom prst="rect">
-            <a:avLst/>
-          </a:prstGeom>
-          <a:noFill/>
-          <a:ln>
-            <a:noFill/>
-          </a:ln>
-        </p:spPr>
-        <p:txBody>
-          <a:bodyPr wrap="none" lIns="0" tIns="0" rIns="0" bIns="0" anchor="t" anchorCtr="0">
-            <a:spAutoFit/>
-          </a:bodyPr>
-          <a:lstStyle/>
-          <a:p>
-            <a:pPr algn="ctr"/>
-            <a:r>
-              <a:rPr lang="zh-CN" sz="1200" b="1" dirty="0">
-                <a:solidFill>
-                  <a:srgbClr val="F3F0E3"/>
-                </a:solidFill>
-                <a:latin typeface="Zen Kaku Gothic New"/>
-                <a:ea typeface="Microsoft YaHei"/>
-                <a:cs typeface="Zen Kaku Gothic New"/>
-              </a:rPr>
-              <a:t>途中の相談</a:t>
-            </a:r>
-          </a:p>
-        </p:txBody>
-      </p:sp>
-      <p:sp>
-        <p:nvSpPr>
-          <p:cNvPr id="35" name="Rectangle 35"/>
-          <p:cNvSpPr/>
-          <p:nvPr/>
-        </p:nvSpPr>
-        <p:spPr>
-          <a:xfrm>
-            <a:off x="9258300" y="4835842"/>
-            <a:ext cx="2552700" cy="247650"/>
-          </a:xfrm>
-          <a:prstGeom prst="rect">
-            <a:avLst/>
-          </a:prstGeom>
-          <a:solidFill>
-            <a:srgbClr val="1A2546"/>
-          </a:solidFill>
-          <a:ln w="13335">
-            <a:solidFill>
-              <a:srgbClr val="F5DC49"/>
-            </a:solidFill>
-            <a:custDash>
-              <a:ds d="357142" sp="214285"/>
-            </a:custDash>
-          </a:ln>
-        </p:spPr>
-      </p:sp>
-      <p:sp>
-        <p:nvSpPr>
-          <p:cNvPr id="36" name="TextBox 36"/>
-          <p:cNvSpPr txBox="1"/>
-          <p:nvPr/>
-        </p:nvSpPr>
-        <p:spPr>
-          <a:xfrm>
-            <a:off x="10190364" y="4867910"/>
-            <a:ext cx="688571" cy="243840"/>
-          </a:xfrm>
-          <a:prstGeom prst="rect">
-            <a:avLst/>
-          </a:prstGeom>
-          <a:noFill/>
-          <a:ln>
-            <a:noFill/>
-          </a:ln>
-        </p:spPr>
-        <p:txBody>
-          <a:bodyPr wrap="none" lIns="0" tIns="0" rIns="0" bIns="0" anchor="t" anchorCtr="0">
-            <a:spAutoFit/>
-          </a:bodyPr>
-          <a:lstStyle/>
-          <a:p>
-            <a:pPr algn="ctr"/>
-            <a:r>
-              <a:rPr lang="zh-CN" sz="1200" b="1" dirty="0">
-                <a:solidFill>
-                  <a:srgbClr val="F3F0E3"/>
-                </a:solidFill>
-                <a:latin typeface="Zen Kaku Gothic New"/>
-                <a:ea typeface="Microsoft YaHei"/>
-                <a:cs typeface="Zen Kaku Gothic New"/>
-              </a:rPr>
-              <a:t>振り返り</a:t>
-            </a:r>
-          </a:p>
-        </p:txBody>
-      </p:sp>
-      <p:sp>
-        <p:nvSpPr>
-          <p:cNvPr id="37" name="Line 37"/>
-          <p:cNvSpPr/>
-          <p:nvPr/>
-        </p:nvSpPr>
-        <p:spPr>
-          <a:xfrm>
-            <a:off x="381000" y="5524500"/>
-            <a:ext cx="11430000" cy="9525"/>
-          </a:xfrm>
-          <a:custGeom>
-            <a:avLst/>
-            <a:gdLst/>
-            <a:ahLst/>
-            <a:cxnLst/>
-            <a:rect l="l" t="t" r="r" b="b"/>
-            <a:pathLst>
-              <a:path w="11430000" h="9525">
-                <a:moveTo>
-                  <a:pt x="0" y="0"/>
-                </a:moveTo>
-                <a:lnTo>
-                  <a:pt x="11430000" y="0"/>
-                </a:lnTo>
-              </a:path>
-            </a:pathLst>
-          </a:custGeom>
-          <a:noFill/>
-          <a:ln w="9525">
-            <a:solidFill>
-              <a:srgbClr val="A8B4D5"/>
-            </a:solidFill>
-          </a:ln>
-        </p:spPr>
-      </p:sp>
-      <p:sp>
-        <p:nvSpPr>
-          <p:cNvPr id="38" name="TextBox 38"/>
-          <p:cNvSpPr txBox="1"/>
-          <p:nvPr/>
-        </p:nvSpPr>
-        <p:spPr>
-          <a:xfrm>
-            <a:off x="354330" y="5726430"/>
-            <a:ext cx="5671194" cy="426720"/>
-          </a:xfrm>
-          <a:prstGeom prst="rect">
-            <a:avLst/>
-          </a:prstGeom>
-          <a:noFill/>
-          <a:ln>
-            <a:noFill/>
-          </a:ln>
-        </p:spPr>
-        <p:txBody>
-          <a:bodyPr wrap="none" lIns="0" tIns="0" rIns="0" bIns="0" anchor="t" anchorCtr="0">
-            <a:spAutoFit/>
-          </a:bodyPr>
-          <a:lstStyle/>
-          <a:p>
-            <a:pPr algn="l"/>
-            <a:r>
-              <a:rPr lang="zh-CN" sz="2100" b="1" dirty="0">
-                <a:solidFill>
-                  <a:srgbClr val="F3F0E3"/>
-                </a:solidFill>
-                <a:latin typeface="Zen Kaku Gothic New"/>
-                <a:ea typeface="Microsoft YaHei"/>
-                <a:cs typeface="Zen Kaku Gothic New"/>
-              </a:rPr>
-              <a:t>試して合わなければ、時間や作業を変える。</a:t>
-            </a:r>
-          </a:p>
-        </p:txBody>
-      </p:sp>
-      <p:sp>
-        <p:nvSpPr>
-          <p:cNvPr id="39" name="Line 39"/>
-          <p:cNvSpPr/>
-          <p:nvPr/>
-        </p:nvSpPr>
-        <p:spPr>
-          <a:xfrm>
-            <a:off x="381000" y="6572250"/>
-            <a:ext cx="11430000" cy="9525"/>
-          </a:xfrm>
-          <a:custGeom>
-            <a:avLst/>
-            <a:gdLst/>
-            <a:ahLst/>
-            <a:cxnLst/>
-            <a:rect l="l" t="t" r="r" b="b"/>
-            <a:pathLst>
-              <a:path w="11430000" h="9525">
-                <a:moveTo>
-                  <a:pt x="0" y="0"/>
-                </a:moveTo>
-                <a:lnTo>
-                  <a:pt x="11430000" y="0"/>
-                </a:lnTo>
-              </a:path>
-            </a:pathLst>
-          </a:custGeom>
-          <a:noFill/>
-          <a:ln w="9525">
-            <a:solidFill>
-              <a:srgbClr val="A8B4D5"/>
-            </a:solidFill>
-          </a:ln>
-        </p:spPr>
-      </p:sp>
-      <p:sp>
-        <p:nvSpPr>
-          <p:cNvPr id="40" name="TextBox 40"/>
-          <p:cNvSpPr txBox="1"/>
-          <p:nvPr/>
-        </p:nvSpPr>
-        <p:spPr>
-          <a:xfrm>
-            <a:off x="365760" y="6623685"/>
-            <a:ext cx="2862121" cy="243840"/>
-          </a:xfrm>
-          <a:prstGeom prst="rect">
-            <a:avLst/>
-          </a:prstGeom>
-          <a:noFill/>
-          <a:ln>
-            <a:noFill/>
-          </a:ln>
-        </p:spPr>
-        <p:txBody>
-          <a:bodyPr wrap="none" lIns="0" tIns="0" rIns="0" bIns="0" anchor="t" anchorCtr="0">
-            <a:spAutoFit/>
-          </a:bodyPr>
-          <a:lstStyle/>
-          <a:p>
-            <a:pPr algn="l"/>
-            <a:r>
-              <a:rPr lang="zh-CN" sz="1200" dirty="0">
-                <a:solidFill>
-                  <a:srgbClr val="F3F0E3"/>
-                </a:solidFill>
-                <a:latin typeface="Zen Kaku Gothic New"/>
-                <a:ea typeface="Microsoft YaHei"/>
-                <a:cs typeface="Zen Kaku Gothic New"/>
-              </a:rPr>
-              <a:t>来源：架空企画 / 試行のための提案</a:t>
-            </a:r>
-          </a:p>
-        </p:txBody>
-      </p:sp>
-      <p:sp>
-        <p:nvSpPr>
-          <p:cNvPr id="41" name="TextBox 41"/>
-          <p:cNvSpPr txBox="1"/>
-          <p:nvPr/>
-        </p:nvSpPr>
-        <p:spPr>
-          <a:xfrm>
-            <a:off x="11322558" y="6623685"/>
-            <a:ext cx="503682" cy="243840"/>
-          </a:xfrm>
-          <a:prstGeom prst="rect">
-            <a:avLst/>
-          </a:prstGeom>
-          <a:noFill/>
-          <a:ln>
-            <a:noFill/>
-          </a:ln>
-        </p:spPr>
-        <p:txBody>
-          <a:bodyPr wrap="none" lIns="0" tIns="0" rIns="0" bIns="0" anchor="t" anchorCtr="0">
-            <a:spAutoFit/>
-          </a:bodyPr>
-          <a:lstStyle/>
-          <a:p>
             <a:pPr algn="r"/>
             <a:r>
-              <a:rPr lang="zh-CN" sz="1200" dirty="0">
-                <a:solidFill>
-                  <a:srgbClr val="F3F0E3"/>
+              <a:rPr lang="zh-CN" sz="825" dirty="0">
+                <a:solidFill>
+                  <a:srgbClr val="6E6E6E"/>
                 </a:solidFill>
                 <a:latin typeface="Manrope"/>
-                <a:ea typeface="Microsoft YaHei"/>
+                <a:ea typeface="Zen Kaku Gothic New"/>
                 <a:cs typeface="Manrope"/>
               </a:rPr>
               <a:t>4 / 4</a:t>
